--- a/resources/templates/ΑΔΥΜ.pptx
+++ b/resources/templates/ΑΔΥΜ.pptx
@@ -5588,7 +5588,7 @@
         <p:spPr>
           <a:xfrm>
             <a:off x="3770475" y="771525"/>
-            <a:ext cx="3644400" cy="415500"/>
+            <a:ext cx="3644400" cy="384900"/>
           </a:xfrm>
           <a:prstGeom prst="rect">
             <a:avLst/>
@@ -5614,14 +5614,14 @@
               <a:buNone/>
             </a:pPr>
             <a:r>
-              <a:rPr lang="el" sz="1500">
+              <a:rPr lang="el" sz="1300">
                 <a:solidFill>
                   <a:schemeClr val="dk1"/>
                 </a:solidFill>
               </a:rPr>
               <a:t>{{Όνομα}} {{Επώνυμο}}</a:t>
             </a:r>
-            <a:endParaRPr sz="1000">
+            <a:endParaRPr sz="800">
               <a:solidFill>
                 <a:schemeClr val="dk1"/>
               </a:solidFill>
@@ -5638,7 +5638,7 @@
         <p:spPr>
           <a:xfrm>
             <a:off x="3572700" y="1031150"/>
-            <a:ext cx="3834900" cy="400200"/>
+            <a:ext cx="3834900" cy="384900"/>
           </a:xfrm>
           <a:prstGeom prst="rect">
             <a:avLst/>
@@ -5667,14 +5667,14 @@
               <a:buNone/>
             </a:pPr>
             <a:r>
-              <a:rPr lang="el">
+              <a:rPr lang="el" sz="1300">
                 <a:solidFill>
                   <a:schemeClr val="dk1"/>
                 </a:solidFill>
               </a:rPr>
               <a:t>{{ΗμΓεν}}</a:t>
             </a:r>
-            <a:endParaRPr>
+            <a:endParaRPr sz="1300">
               <a:solidFill>
                 <a:schemeClr val="dk1"/>
               </a:solidFill>
@@ -5740,8 +5740,8 @@
         </p:nvSpPr>
         <p:spPr>
           <a:xfrm>
-            <a:off x="2580000" y="1431350"/>
-            <a:ext cx="4844400" cy="400200"/>
+            <a:off x="2570475" y="1470636"/>
+            <a:ext cx="4844400" cy="369300"/>
           </a:xfrm>
           <a:prstGeom prst="rect">
             <a:avLst/>
@@ -5767,14 +5767,14 @@
               <a:buNone/>
             </a:pPr>
             <a:r>
-              <a:rPr lang="el">
+              <a:rPr lang="el" sz="1200">
                 <a:solidFill>
                   <a:schemeClr val="dk1"/>
                 </a:solidFill>
               </a:rPr>
-              <a:t>{{Σχολείο}} Δράμας				Α’</a:t>
+              <a:t>{{Σχολείο}}						{{TAXI}}</a:t>
             </a:r>
-            <a:endParaRPr>
+            <a:endParaRPr sz="1200">
               <a:solidFill>
                 <a:schemeClr val="dk1"/>
               </a:solidFill>

--- a/resources/templates/ΑΔΥΜ.pptx
+++ b/resources/templates/ΑΔΥΜ.pptx
@@ -1,20 +1,20 @@
 
 <file path=ppt/presentation.xml><?xml version="1.0" encoding="utf-8"?>
-<p:presentation xmlns:a="http://schemas.openxmlformats.org/drawingml/2006/main" xmlns:r="http://schemas.openxmlformats.org/officeDocument/2006/relationships" xmlns:mc="http://schemas.openxmlformats.org/markup-compatibility/2006" xmlns:mv="urn:schemas-microsoft-com:mac:vml" xmlns:p="http://schemas.openxmlformats.org/presentationml/2006/main" xmlns:c="http://schemas.openxmlformats.org/drawingml/2006/chart" xmlns:dgm="http://schemas.openxmlformats.org/drawingml/2006/diagram" xmlns:o="urn:schemas-microsoft-com:office:office" xmlns:v="urn:schemas-microsoft-com:vml" xmlns:pvml="urn:schemas-microsoft-com:office:powerpoint" xmlns:com="http://schemas.openxmlformats.org/drawingml/2006/compatibility" xmlns:p14="http://schemas.microsoft.com/office/powerpoint/2010/main" xmlns:p15="http://schemas.microsoft.com/office/powerpoint/2012/main" xmlns:ahyp="http://schemas.microsoft.com/office/drawing/2018/hyperlinkcolor" autoCompressPictures="0" strictFirstAndLastChars="0" saveSubsetFonts="1">
+<p:presentation xmlns:a="http://schemas.openxmlformats.org/drawingml/2006/main" xmlns:r="http://schemas.openxmlformats.org/officeDocument/2006/relationships" xmlns:p="http://schemas.openxmlformats.org/presentationml/2006/main" strictFirstAndLastChars="0" saveSubsetFonts="1" autoCompressPictures="0">
   <p:sldMasterIdLst>
-    <p:sldMasterId id="2147483659" r:id="rId4"/>
+    <p:sldMasterId id="2147483659" r:id="rId1"/>
   </p:sldMasterIdLst>
   <p:notesMasterIdLst>
-    <p:notesMasterId r:id="rId5"/>
+    <p:notesMasterId r:id="rId4"/>
   </p:notesMasterIdLst>
   <p:sldIdLst>
-    <p:sldId id="256" r:id="rId6"/>
-    <p:sldId id="257" r:id="rId7"/>
+    <p:sldId id="256" r:id="rId2"/>
+    <p:sldId id="257" r:id="rId3"/>
   </p:sldIdLst>
-  <p:sldSz cy="10692000" cx="7560000"/>
+  <p:sldSz cx="7559675" cy="10691813"/>
   <p:notesSz cx="6858000" cy="9144000"/>
   <p:defaultTextStyle>
-    <a:defPPr lvl="0" marR="0" rtl="0" algn="l">
+    <a:defPPr marR="0" lvl="0" algn="l" rtl="0">
       <a:lnSpc>
         <a:spcPct val="100000"/>
       </a:lnSpc>
@@ -25,7 +25,7 @@
         <a:spcPts val="0"/>
       </a:spcAft>
     </a:defPPr>
-    <a:lvl1pPr lvl="0" marR="0" rtl="0" algn="l">
+    <a:lvl1pPr marR="0" lvl="0" algn="l" rtl="0">
       <a:lnSpc>
         <a:spcPct val="100000"/>
       </a:lnSpc>
@@ -39,7 +39,7 @@
         <a:srgbClr val="000000"/>
       </a:buClr>
       <a:buFont typeface="Arial"/>
-      <a:defRPr b="0" i="0" sz="1400" u="none" cap="none" strike="noStrike">
+      <a:defRPr sz="1400" b="0" i="0" u="none" strike="noStrike" cap="none">
         <a:solidFill>
           <a:srgbClr val="000000"/>
         </a:solidFill>
@@ -49,7 +49,7 @@
         <a:sym typeface="Arial"/>
       </a:defRPr>
     </a:lvl1pPr>
-    <a:lvl2pPr lvl="1" marR="0" rtl="0" algn="l">
+    <a:lvl2pPr marR="0" lvl="1" algn="l" rtl="0">
       <a:lnSpc>
         <a:spcPct val="100000"/>
       </a:lnSpc>
@@ -63,7 +63,7 @@
         <a:srgbClr val="000000"/>
       </a:buClr>
       <a:buFont typeface="Arial"/>
-      <a:defRPr b="0" i="0" sz="1400" u="none" cap="none" strike="noStrike">
+      <a:defRPr sz="1400" b="0" i="0" u="none" strike="noStrike" cap="none">
         <a:solidFill>
           <a:srgbClr val="000000"/>
         </a:solidFill>
@@ -73,7 +73,7 @@
         <a:sym typeface="Arial"/>
       </a:defRPr>
     </a:lvl2pPr>
-    <a:lvl3pPr lvl="2" marR="0" rtl="0" algn="l">
+    <a:lvl3pPr marR="0" lvl="2" algn="l" rtl="0">
       <a:lnSpc>
         <a:spcPct val="100000"/>
       </a:lnSpc>
@@ -87,7 +87,7 @@
         <a:srgbClr val="000000"/>
       </a:buClr>
       <a:buFont typeface="Arial"/>
-      <a:defRPr b="0" i="0" sz="1400" u="none" cap="none" strike="noStrike">
+      <a:defRPr sz="1400" b="0" i="0" u="none" strike="noStrike" cap="none">
         <a:solidFill>
           <a:srgbClr val="000000"/>
         </a:solidFill>
@@ -97,7 +97,7 @@
         <a:sym typeface="Arial"/>
       </a:defRPr>
     </a:lvl3pPr>
-    <a:lvl4pPr lvl="3" marR="0" rtl="0" algn="l">
+    <a:lvl4pPr marR="0" lvl="3" algn="l" rtl="0">
       <a:lnSpc>
         <a:spcPct val="100000"/>
       </a:lnSpc>
@@ -111,7 +111,7 @@
         <a:srgbClr val="000000"/>
       </a:buClr>
       <a:buFont typeface="Arial"/>
-      <a:defRPr b="0" i="0" sz="1400" u="none" cap="none" strike="noStrike">
+      <a:defRPr sz="1400" b="0" i="0" u="none" strike="noStrike" cap="none">
         <a:solidFill>
           <a:srgbClr val="000000"/>
         </a:solidFill>
@@ -121,7 +121,7 @@
         <a:sym typeface="Arial"/>
       </a:defRPr>
     </a:lvl4pPr>
-    <a:lvl5pPr lvl="4" marR="0" rtl="0" algn="l">
+    <a:lvl5pPr marR="0" lvl="4" algn="l" rtl="0">
       <a:lnSpc>
         <a:spcPct val="100000"/>
       </a:lnSpc>
@@ -135,7 +135,7 @@
         <a:srgbClr val="000000"/>
       </a:buClr>
       <a:buFont typeface="Arial"/>
-      <a:defRPr b="0" i="0" sz="1400" u="none" cap="none" strike="noStrike">
+      <a:defRPr sz="1400" b="0" i="0" u="none" strike="noStrike" cap="none">
         <a:solidFill>
           <a:srgbClr val="000000"/>
         </a:solidFill>
@@ -145,7 +145,7 @@
         <a:sym typeface="Arial"/>
       </a:defRPr>
     </a:lvl5pPr>
-    <a:lvl6pPr lvl="5" marR="0" rtl="0" algn="l">
+    <a:lvl6pPr marR="0" lvl="5" algn="l" rtl="0">
       <a:lnSpc>
         <a:spcPct val="100000"/>
       </a:lnSpc>
@@ -159,7 +159,7 @@
         <a:srgbClr val="000000"/>
       </a:buClr>
       <a:buFont typeface="Arial"/>
-      <a:defRPr b="0" i="0" sz="1400" u="none" cap="none" strike="noStrike">
+      <a:defRPr sz="1400" b="0" i="0" u="none" strike="noStrike" cap="none">
         <a:solidFill>
           <a:srgbClr val="000000"/>
         </a:solidFill>
@@ -169,7 +169,7 @@
         <a:sym typeface="Arial"/>
       </a:defRPr>
     </a:lvl6pPr>
-    <a:lvl7pPr lvl="6" marR="0" rtl="0" algn="l">
+    <a:lvl7pPr marR="0" lvl="6" algn="l" rtl="0">
       <a:lnSpc>
         <a:spcPct val="100000"/>
       </a:lnSpc>
@@ -183,7 +183,7 @@
         <a:srgbClr val="000000"/>
       </a:buClr>
       <a:buFont typeface="Arial"/>
-      <a:defRPr b="0" i="0" sz="1400" u="none" cap="none" strike="noStrike">
+      <a:defRPr sz="1400" b="0" i="0" u="none" strike="noStrike" cap="none">
         <a:solidFill>
           <a:srgbClr val="000000"/>
         </a:solidFill>
@@ -193,7 +193,7 @@
         <a:sym typeface="Arial"/>
       </a:defRPr>
     </a:lvl7pPr>
-    <a:lvl8pPr lvl="7" marR="0" rtl="0" algn="l">
+    <a:lvl8pPr marR="0" lvl="7" algn="l" rtl="0">
       <a:lnSpc>
         <a:spcPct val="100000"/>
       </a:lnSpc>
@@ -207,7 +207,7 @@
         <a:srgbClr val="000000"/>
       </a:buClr>
       <a:buFont typeface="Arial"/>
-      <a:defRPr b="0" i="0" sz="1400" u="none" cap="none" strike="noStrike">
+      <a:defRPr sz="1400" b="0" i="0" u="none" strike="noStrike" cap="none">
         <a:solidFill>
           <a:srgbClr val="000000"/>
         </a:solidFill>
@@ -217,7 +217,7 @@
         <a:sym typeface="Arial"/>
       </a:defRPr>
     </a:lvl8pPr>
-    <a:lvl9pPr lvl="8" marR="0" rtl="0" algn="l">
+    <a:lvl9pPr marR="0" lvl="8" algn="l" rtl="0">
       <a:lnSpc>
         <a:spcPct val="100000"/>
       </a:lnSpc>
@@ -231,7 +231,7 @@
         <a:srgbClr val="000000"/>
       </a:buClr>
       <a:buFont typeface="Arial"/>
-      <a:defRPr b="0" i="0" sz="1400" u="none" cap="none" strike="noStrike">
+      <a:defRPr sz="1400" b="0" i="0" u="none" strike="noStrike" cap="none">
         <a:solidFill>
           <a:srgbClr val="000000"/>
         </a:solidFill>
@@ -244,7 +244,7 @@
   </p:defaultTextStyle>
   <p:extLst>
     <p:ext uri="{EFAFB233-063F-42B5-8137-9DF3F51BA10A}">
-      <p15:sldGuideLst>
+      <p15:sldGuideLst xmlns:p15="http://schemas.microsoft.com/office/powerpoint/2012/main">
         <p15:guide id="1" orient="horz" pos="3368">
           <p15:clr>
             <a:srgbClr val="747775"/>
@@ -262,11 +262,16 @@
 </file>
 
 <file path=ppt/notesMasters/notesMaster1.xml><?xml version="1.0" encoding="utf-8"?>
-<p:notesMaster xmlns:a="http://schemas.openxmlformats.org/drawingml/2006/main" xmlns:r="http://schemas.openxmlformats.org/officeDocument/2006/relationships" xmlns:mc="http://schemas.openxmlformats.org/markup-compatibility/2006" xmlns:mv="urn:schemas-microsoft-com:mac:vml" xmlns:p="http://schemas.openxmlformats.org/presentationml/2006/main" xmlns:c="http://schemas.openxmlformats.org/drawingml/2006/chart" xmlns:dgm="http://schemas.openxmlformats.org/drawingml/2006/diagram" xmlns:o="urn:schemas-microsoft-com:office:office" xmlns:v="urn:schemas-microsoft-com:vml" xmlns:pvml="urn:schemas-microsoft-com:office:powerpoint" xmlns:com="http://schemas.openxmlformats.org/drawingml/2006/compatibility" xmlns:p14="http://schemas.microsoft.com/office/powerpoint/2010/main" xmlns:p15="http://schemas.microsoft.com/office/powerpoint/2012/main" xmlns:ahyp="http://schemas.microsoft.com/office/drawing/2018/hyperlinkcolor">
+<p:notesMaster xmlns:a="http://schemas.openxmlformats.org/drawingml/2006/main" xmlns:r="http://schemas.openxmlformats.org/officeDocument/2006/relationships" xmlns:p="http://schemas.openxmlformats.org/presentationml/2006/main">
   <p:cSld>
+    <p:bg>
+      <p:bgRef idx="1001">
+        <a:schemeClr val="bg1"/>
+      </p:bgRef>
+    </p:bg>
     <p:spTree>
       <p:nvGrpSpPr>
-        <p:cNvPr id="2" name="Shape 2"/>
+        <p:cNvPr id="1" name="Shape 2"/>
         <p:cNvGrpSpPr/>
         <p:nvPr/>
       </p:nvGrpSpPr>
@@ -281,9 +286,11 @@
       <p:sp>
         <p:nvSpPr>
           <p:cNvPr id="3" name="Google Shape;3;n"/>
-          <p:cNvSpPr/>
+          <p:cNvSpPr>
+            <a:spLocks noGrp="1" noRot="1" noChangeAspect="1"/>
+          </p:cNvSpPr>
           <p:nvPr>
-            <p:ph idx="2" type="sldImg"/>
+            <p:ph type="sldImg" idx="2"/>
           </p:nvPr>
         </p:nvSpPr>
         <p:spPr>
@@ -292,9 +299,13 @@
             <a:ext cx="2424600" cy="3429000"/>
           </a:xfrm>
           <a:custGeom>
-            <a:rect b="b" l="l" r="r" t="t"/>
+            <a:avLst/>
+            <a:gdLst/>
+            <a:ahLst/>
+            <a:cxnLst/>
+            <a:rect l="l" t="t" r="r" b="b"/>
             <a:pathLst>
-              <a:path extrusionOk="0" h="120000" w="120000">
+              <a:path w="120000" h="120000" extrusionOk="0">
                 <a:moveTo>
                   <a:pt x="0" y="0"/>
                 </a:moveTo>
@@ -312,23 +323,25 @@
             </a:pathLst>
           </a:custGeom>
           <a:noFill/>
-          <a:ln cap="flat" cmpd="sng" w="9525">
+          <a:ln w="9525" cap="flat" cmpd="sng">
             <a:solidFill>
               <a:srgbClr val="000000"/>
             </a:solidFill>
             <a:prstDash val="solid"/>
             <a:round/>
-            <a:headEnd len="sm" w="sm" type="none"/>
-            <a:tailEnd len="sm" w="sm" type="none"/>
+            <a:headEnd type="none" w="sm" len="sm"/>
+            <a:tailEnd type="none" w="sm" len="sm"/>
           </a:ln>
         </p:spPr>
       </p:sp>
       <p:sp>
         <p:nvSpPr>
           <p:cNvPr id="4" name="Google Shape;4;n"/>
-          <p:cNvSpPr txBox="1"/>
+          <p:cNvSpPr txBox="1">
+            <a:spLocks noGrp="1"/>
+          </p:cNvSpPr>
           <p:nvPr>
-            <p:ph idx="1" type="body"/>
+            <p:ph type="body" idx="1"/>
           </p:nvPr>
         </p:nvSpPr>
         <p:spPr>
@@ -345,11 +358,11 @@
           </a:ln>
         </p:spPr>
         <p:txBody>
-          <a:bodyPr anchorCtr="0" anchor="t" bIns="91425" lIns="91425" spcFirstLastPara="1" rIns="91425" wrap="square" tIns="91425">
+          <a:bodyPr spcFirstLastPara="1" wrap="square" lIns="91425" tIns="91425" rIns="91425" bIns="91425" anchor="t" anchorCtr="0">
             <a:noAutofit/>
           </a:bodyPr>
           <a:lstStyle>
-            <a:lvl1pPr indent="-298450" lvl="0" marL="457200">
+            <a:lvl1pPr marL="457200" lvl="0" indent="-298450">
               <a:spcBef>
                 <a:spcPts val="0"/>
               </a:spcBef>
@@ -360,7 +373,7 @@
               <a:buChar char="●"/>
               <a:defRPr sz="1100"/>
             </a:lvl1pPr>
-            <a:lvl2pPr indent="-298450" lvl="1" marL="914400">
+            <a:lvl2pPr marL="914400" lvl="1" indent="-298450">
               <a:spcBef>
                 <a:spcPts val="0"/>
               </a:spcBef>
@@ -371,7 +384,7 @@
               <a:buChar char="○"/>
               <a:defRPr sz="1100"/>
             </a:lvl2pPr>
-            <a:lvl3pPr indent="-298450" lvl="2" marL="1371600">
+            <a:lvl3pPr marL="1371600" lvl="2" indent="-298450">
               <a:spcBef>
                 <a:spcPts val="0"/>
               </a:spcBef>
@@ -382,7 +395,7 @@
               <a:buChar char="■"/>
               <a:defRPr sz="1100"/>
             </a:lvl3pPr>
-            <a:lvl4pPr indent="-298450" lvl="3" marL="1828800">
+            <a:lvl4pPr marL="1828800" lvl="3" indent="-298450">
               <a:spcBef>
                 <a:spcPts val="0"/>
               </a:spcBef>
@@ -393,7 +406,7 @@
               <a:buChar char="●"/>
               <a:defRPr sz="1100"/>
             </a:lvl4pPr>
-            <a:lvl5pPr indent="-298450" lvl="4" marL="2286000">
+            <a:lvl5pPr marL="2286000" lvl="4" indent="-298450">
               <a:spcBef>
                 <a:spcPts val="0"/>
               </a:spcBef>
@@ -404,7 +417,7 @@
               <a:buChar char="○"/>
               <a:defRPr sz="1100"/>
             </a:lvl5pPr>
-            <a:lvl6pPr indent="-298450" lvl="5" marL="2743200">
+            <a:lvl6pPr marL="2743200" lvl="5" indent="-298450">
               <a:spcBef>
                 <a:spcPts val="0"/>
               </a:spcBef>
@@ -415,7 +428,7 @@
               <a:buChar char="■"/>
               <a:defRPr sz="1100"/>
             </a:lvl6pPr>
-            <a:lvl7pPr indent="-298450" lvl="6" marL="3200400">
+            <a:lvl7pPr marL="3200400" lvl="6" indent="-298450">
               <a:spcBef>
                 <a:spcPts val="0"/>
               </a:spcBef>
@@ -426,7 +439,7 @@
               <a:buChar char="●"/>
               <a:defRPr sz="1100"/>
             </a:lvl7pPr>
-            <a:lvl8pPr indent="-298450" lvl="7" marL="3657600">
+            <a:lvl8pPr marL="3657600" lvl="7" indent="-298450">
               <a:spcBef>
                 <a:spcPts val="0"/>
               </a:spcBef>
@@ -437,7 +450,7 @@
               <a:buChar char="○"/>
               <a:defRPr sz="1100"/>
             </a:lvl8pPr>
-            <a:lvl9pPr indent="-298450" lvl="8" marL="4114800">
+            <a:lvl9pPr marL="4114800" lvl="8" indent="-298450">
               <a:spcBef>
                 <a:spcPts val="0"/>
               </a:spcBef>
@@ -449,14 +462,16 @@
               <a:defRPr sz="1100"/>
             </a:lvl9pPr>
           </a:lstStyle>
-          <a:p/>
+          <a:p>
+            <a:endParaRPr/>
+          </a:p>
         </p:txBody>
       </p:sp>
     </p:spTree>
   </p:cSld>
-  <p:clrMap accent1="accent1" accent2="accent2" accent3="accent3" accent4="accent4" accent5="accent5" accent6="accent6" bg1="lt1" bg2="dk2" tx1="dk1" tx2="lt2" folHlink="folHlink" hlink="hlink"/>
+  <p:clrMap bg1="lt1" tx1="dk1" bg2="dk2" tx2="lt2" accent1="accent1" accent2="accent2" accent3="accent3" accent4="accent4" accent5="accent5" accent6="accent6" hlink="hlink" folHlink="folHlink"/>
   <p:notesStyle>
-    <a:defPPr lvl="0" marR="0" rtl="0" algn="l">
+    <a:defPPr marR="0" lvl="0" algn="l" rtl="0">
       <a:lnSpc>
         <a:spcPct val="100000"/>
       </a:lnSpc>
@@ -467,7 +482,7 @@
         <a:spcPts val="0"/>
       </a:spcAft>
     </a:defPPr>
-    <a:lvl1pPr lvl="0" marR="0" rtl="0" algn="l">
+    <a:lvl1pPr marR="0" lvl="0" algn="l" rtl="0">
       <a:lnSpc>
         <a:spcPct val="100000"/>
       </a:lnSpc>
@@ -481,7 +496,7 @@
         <a:srgbClr val="000000"/>
       </a:buClr>
       <a:buFont typeface="Arial"/>
-      <a:defRPr b="0" i="0" sz="1400" u="none" cap="none" strike="noStrike">
+      <a:defRPr sz="1400" b="0" i="0" u="none" strike="noStrike" cap="none">
         <a:solidFill>
           <a:srgbClr val="000000"/>
         </a:solidFill>
@@ -491,7 +506,7 @@
         <a:sym typeface="Arial"/>
       </a:defRPr>
     </a:lvl1pPr>
-    <a:lvl2pPr lvl="1" marR="0" rtl="0" algn="l">
+    <a:lvl2pPr marR="0" lvl="1" algn="l" rtl="0">
       <a:lnSpc>
         <a:spcPct val="100000"/>
       </a:lnSpc>
@@ -505,7 +520,7 @@
         <a:srgbClr val="000000"/>
       </a:buClr>
       <a:buFont typeface="Arial"/>
-      <a:defRPr b="0" i="0" sz="1400" u="none" cap="none" strike="noStrike">
+      <a:defRPr sz="1400" b="0" i="0" u="none" strike="noStrike" cap="none">
         <a:solidFill>
           <a:srgbClr val="000000"/>
         </a:solidFill>
@@ -515,7 +530,7 @@
         <a:sym typeface="Arial"/>
       </a:defRPr>
     </a:lvl2pPr>
-    <a:lvl3pPr lvl="2" marR="0" rtl="0" algn="l">
+    <a:lvl3pPr marR="0" lvl="2" algn="l" rtl="0">
       <a:lnSpc>
         <a:spcPct val="100000"/>
       </a:lnSpc>
@@ -529,7 +544,7 @@
         <a:srgbClr val="000000"/>
       </a:buClr>
       <a:buFont typeface="Arial"/>
-      <a:defRPr b="0" i="0" sz="1400" u="none" cap="none" strike="noStrike">
+      <a:defRPr sz="1400" b="0" i="0" u="none" strike="noStrike" cap="none">
         <a:solidFill>
           <a:srgbClr val="000000"/>
         </a:solidFill>
@@ -539,7 +554,7 @@
         <a:sym typeface="Arial"/>
       </a:defRPr>
     </a:lvl3pPr>
-    <a:lvl4pPr lvl="3" marR="0" rtl="0" algn="l">
+    <a:lvl4pPr marR="0" lvl="3" algn="l" rtl="0">
       <a:lnSpc>
         <a:spcPct val="100000"/>
       </a:lnSpc>
@@ -553,7 +568,7 @@
         <a:srgbClr val="000000"/>
       </a:buClr>
       <a:buFont typeface="Arial"/>
-      <a:defRPr b="0" i="0" sz="1400" u="none" cap="none" strike="noStrike">
+      <a:defRPr sz="1400" b="0" i="0" u="none" strike="noStrike" cap="none">
         <a:solidFill>
           <a:srgbClr val="000000"/>
         </a:solidFill>
@@ -563,7 +578,7 @@
         <a:sym typeface="Arial"/>
       </a:defRPr>
     </a:lvl4pPr>
-    <a:lvl5pPr lvl="4" marR="0" rtl="0" algn="l">
+    <a:lvl5pPr marR="0" lvl="4" algn="l" rtl="0">
       <a:lnSpc>
         <a:spcPct val="100000"/>
       </a:lnSpc>
@@ -577,7 +592,7 @@
         <a:srgbClr val="000000"/>
       </a:buClr>
       <a:buFont typeface="Arial"/>
-      <a:defRPr b="0" i="0" sz="1400" u="none" cap="none" strike="noStrike">
+      <a:defRPr sz="1400" b="0" i="0" u="none" strike="noStrike" cap="none">
         <a:solidFill>
           <a:srgbClr val="000000"/>
         </a:solidFill>
@@ -587,7 +602,7 @@
         <a:sym typeface="Arial"/>
       </a:defRPr>
     </a:lvl5pPr>
-    <a:lvl6pPr lvl="5" marR="0" rtl="0" algn="l">
+    <a:lvl6pPr marR="0" lvl="5" algn="l" rtl="0">
       <a:lnSpc>
         <a:spcPct val="100000"/>
       </a:lnSpc>
@@ -601,7 +616,7 @@
         <a:srgbClr val="000000"/>
       </a:buClr>
       <a:buFont typeface="Arial"/>
-      <a:defRPr b="0" i="0" sz="1400" u="none" cap="none" strike="noStrike">
+      <a:defRPr sz="1400" b="0" i="0" u="none" strike="noStrike" cap="none">
         <a:solidFill>
           <a:srgbClr val="000000"/>
         </a:solidFill>
@@ -611,7 +626,7 @@
         <a:sym typeface="Arial"/>
       </a:defRPr>
     </a:lvl6pPr>
-    <a:lvl7pPr lvl="6" marR="0" rtl="0" algn="l">
+    <a:lvl7pPr marR="0" lvl="6" algn="l" rtl="0">
       <a:lnSpc>
         <a:spcPct val="100000"/>
       </a:lnSpc>
@@ -625,7 +640,7 @@
         <a:srgbClr val="000000"/>
       </a:buClr>
       <a:buFont typeface="Arial"/>
-      <a:defRPr b="0" i="0" sz="1400" u="none" cap="none" strike="noStrike">
+      <a:defRPr sz="1400" b="0" i="0" u="none" strike="noStrike" cap="none">
         <a:solidFill>
           <a:srgbClr val="000000"/>
         </a:solidFill>
@@ -635,7 +650,7 @@
         <a:sym typeface="Arial"/>
       </a:defRPr>
     </a:lvl7pPr>
-    <a:lvl8pPr lvl="7" marR="0" rtl="0" algn="l">
+    <a:lvl8pPr marR="0" lvl="7" algn="l" rtl="0">
       <a:lnSpc>
         <a:spcPct val="100000"/>
       </a:lnSpc>
@@ -649,7 +664,7 @@
         <a:srgbClr val="000000"/>
       </a:buClr>
       <a:buFont typeface="Arial"/>
-      <a:defRPr b="0" i="0" sz="1400" u="none" cap="none" strike="noStrike">
+      <a:defRPr sz="1400" b="0" i="0" u="none" strike="noStrike" cap="none">
         <a:solidFill>
           <a:srgbClr val="000000"/>
         </a:solidFill>
@@ -659,7 +674,7 @@
         <a:sym typeface="Arial"/>
       </a:defRPr>
     </a:lvl8pPr>
-    <a:lvl9pPr lvl="8" marR="0" rtl="0" algn="l">
+    <a:lvl9pPr marR="0" lvl="8" algn="l" rtl="0">
       <a:lnSpc>
         <a:spcPct val="100000"/>
       </a:lnSpc>
@@ -673,7 +688,7 @@
         <a:srgbClr val="000000"/>
       </a:buClr>
       <a:buFont typeface="Arial"/>
-      <a:defRPr b="0" i="0" sz="1400" u="none" cap="none" strike="noStrike">
+      <a:defRPr sz="1400" b="0" i="0" u="none" strike="noStrike" cap="none">
         <a:solidFill>
           <a:srgbClr val="000000"/>
         </a:solidFill>
@@ -688,11 +703,11 @@
 </file>
 
 <file path=ppt/notesSlides/notesSlide1.xml><?xml version="1.0" encoding="utf-8"?>
-<p:notes xmlns:a="http://schemas.openxmlformats.org/drawingml/2006/main" xmlns:r="http://schemas.openxmlformats.org/officeDocument/2006/relationships" xmlns:mc="http://schemas.openxmlformats.org/markup-compatibility/2006" xmlns:mv="urn:schemas-microsoft-com:mac:vml" xmlns:p="http://schemas.openxmlformats.org/presentationml/2006/main" xmlns:c="http://schemas.openxmlformats.org/drawingml/2006/chart" xmlns:dgm="http://schemas.openxmlformats.org/drawingml/2006/diagram" xmlns:o="urn:schemas-microsoft-com:office:office" xmlns:v="urn:schemas-microsoft-com:vml" xmlns:pvml="urn:schemas-microsoft-com:office:powerpoint" xmlns:com="http://schemas.openxmlformats.org/drawingml/2006/compatibility" xmlns:p14="http://schemas.microsoft.com/office/powerpoint/2010/main" xmlns:p15="http://schemas.microsoft.com/office/powerpoint/2012/main" xmlns:ahyp="http://schemas.microsoft.com/office/drawing/2018/hyperlinkcolor" showMasterPhAnim="0" showMasterSp="0">
+<p:notes xmlns:a="http://schemas.openxmlformats.org/drawingml/2006/main" xmlns:r="http://schemas.openxmlformats.org/officeDocument/2006/relationships" xmlns:p="http://schemas.openxmlformats.org/presentationml/2006/main" showMasterSp="0" showMasterPhAnim="0">
   <p:cSld>
     <p:spTree>
       <p:nvGrpSpPr>
-        <p:cNvPr id="50" name="Shape 50"/>
+        <p:cNvPr id="1" name="Shape 50"/>
         <p:cNvGrpSpPr/>
         <p:nvPr/>
       </p:nvGrpSpPr>
@@ -707,20 +722,26 @@
       <p:sp>
         <p:nvSpPr>
           <p:cNvPr id="51" name="Google Shape;51;p:notes"/>
-          <p:cNvSpPr/>
+          <p:cNvSpPr>
+            <a:spLocks noGrp="1" noRot="1" noChangeAspect="1"/>
+          </p:cNvSpPr>
           <p:nvPr>
-            <p:ph idx="2" type="sldImg"/>
+            <p:ph type="sldImg" idx="2"/>
           </p:nvPr>
         </p:nvSpPr>
         <p:spPr>
           <a:xfrm>
-            <a:off x="2217050" y="685800"/>
-            <a:ext cx="2424600" cy="3429000"/>
+            <a:off x="2217738" y="685800"/>
+            <a:ext cx="2424112" cy="3429000"/>
           </a:xfrm>
           <a:custGeom>
-            <a:rect b="b" l="l" r="r" t="t"/>
+            <a:avLst/>
+            <a:gdLst/>
+            <a:ahLst/>
+            <a:cxnLst/>
+            <a:rect l="l" t="t" r="r" b="b"/>
             <a:pathLst>
-              <a:path extrusionOk="0" h="120000" w="120000">
+              <a:path w="120000" h="120000" extrusionOk="0">
                 <a:moveTo>
                   <a:pt x="0" y="0"/>
                 </a:moveTo>
@@ -742,9 +763,11 @@
       <p:sp>
         <p:nvSpPr>
           <p:cNvPr id="52" name="Google Shape;52;p:notes"/>
-          <p:cNvSpPr txBox="1"/>
+          <p:cNvSpPr txBox="1">
+            <a:spLocks noGrp="1"/>
+          </p:cNvSpPr>
           <p:nvPr>
-            <p:ph idx="1" type="body"/>
+            <p:ph type="body" idx="1"/>
           </p:nvPr>
         </p:nvSpPr>
         <p:spPr>
@@ -757,12 +780,12 @@
           </a:prstGeom>
         </p:spPr>
         <p:txBody>
-          <a:bodyPr anchorCtr="0" anchor="t" bIns="91425" lIns="91425" spcFirstLastPara="1" rIns="91425" wrap="square" tIns="91425">
+          <a:bodyPr spcFirstLastPara="1" wrap="square" lIns="91425" tIns="91425" rIns="91425" bIns="91425" anchor="t" anchorCtr="0">
             <a:noAutofit/>
           </a:bodyPr>
           <a:lstStyle/>
           <a:p>
-            <a:pPr indent="0" lvl="0" marL="0" rtl="0" algn="l">
+            <a:pPr marL="0" lvl="0" indent="0" algn="l" rtl="0">
               <a:spcBef>
                 <a:spcPts val="0"/>
               </a:spcBef>
@@ -771,9 +794,6 @@
               </a:spcAft>
               <a:buNone/>
             </a:pPr>
-            <a:r>
-              <a:t/>
-            </a:r>
             <a:endParaRPr/>
           </a:p>
         </p:txBody>
@@ -787,11 +807,11 @@
 </file>
 
 <file path=ppt/notesSlides/notesSlide2.xml><?xml version="1.0" encoding="utf-8"?>
-<p:notes xmlns:a="http://schemas.openxmlformats.org/drawingml/2006/main" xmlns:r="http://schemas.openxmlformats.org/officeDocument/2006/relationships" xmlns:mc="http://schemas.openxmlformats.org/markup-compatibility/2006" xmlns:mv="urn:schemas-microsoft-com:mac:vml" xmlns:p="http://schemas.openxmlformats.org/presentationml/2006/main" xmlns:c="http://schemas.openxmlformats.org/drawingml/2006/chart" xmlns:dgm="http://schemas.openxmlformats.org/drawingml/2006/diagram" xmlns:o="urn:schemas-microsoft-com:office:office" xmlns:v="urn:schemas-microsoft-com:vml" xmlns:pvml="urn:schemas-microsoft-com:office:powerpoint" xmlns:com="http://schemas.openxmlformats.org/drawingml/2006/compatibility" xmlns:p14="http://schemas.microsoft.com/office/powerpoint/2010/main" xmlns:p15="http://schemas.microsoft.com/office/powerpoint/2012/main" xmlns:ahyp="http://schemas.microsoft.com/office/drawing/2018/hyperlinkcolor" showMasterPhAnim="0" showMasterSp="0">
+<p:notes xmlns:a="http://schemas.openxmlformats.org/drawingml/2006/main" xmlns:r="http://schemas.openxmlformats.org/officeDocument/2006/relationships" xmlns:p="http://schemas.openxmlformats.org/presentationml/2006/main" showMasterSp="0" showMasterPhAnim="0">
   <p:cSld>
     <p:spTree>
       <p:nvGrpSpPr>
-        <p:cNvPr id="61" name="Shape 61"/>
+        <p:cNvPr id="1" name="Shape 61"/>
         <p:cNvGrpSpPr/>
         <p:nvPr/>
       </p:nvGrpSpPr>
@@ -806,9 +826,11 @@
       <p:sp>
         <p:nvSpPr>
           <p:cNvPr id="62" name="Google Shape;62;g399096a4f41_0_1:notes"/>
-          <p:cNvSpPr/>
+          <p:cNvSpPr>
+            <a:spLocks noGrp="1" noRot="1" noChangeAspect="1"/>
+          </p:cNvSpPr>
           <p:nvPr>
-            <p:ph idx="2" type="sldImg"/>
+            <p:ph type="sldImg" idx="2"/>
           </p:nvPr>
         </p:nvSpPr>
         <p:spPr>
@@ -817,9 +839,13 @@
             <a:ext cx="2424600" cy="3429000"/>
           </a:xfrm>
           <a:custGeom>
-            <a:rect b="b" l="l" r="r" t="t"/>
+            <a:avLst/>
+            <a:gdLst/>
+            <a:ahLst/>
+            <a:cxnLst/>
+            <a:rect l="l" t="t" r="r" b="b"/>
             <a:pathLst>
-              <a:path extrusionOk="0" h="120000" w="120000">
+              <a:path w="120000" h="120000" extrusionOk="0">
                 <a:moveTo>
                   <a:pt x="0" y="0"/>
                 </a:moveTo>
@@ -841,9 +867,11 @@
       <p:sp>
         <p:nvSpPr>
           <p:cNvPr id="63" name="Google Shape;63;g399096a4f41_0_1:notes"/>
-          <p:cNvSpPr txBox="1"/>
+          <p:cNvSpPr txBox="1">
+            <a:spLocks noGrp="1"/>
+          </p:cNvSpPr>
           <p:nvPr>
-            <p:ph idx="1" type="body"/>
+            <p:ph type="body" idx="1"/>
           </p:nvPr>
         </p:nvSpPr>
         <p:spPr>
@@ -856,12 +884,12 @@
           </a:prstGeom>
         </p:spPr>
         <p:txBody>
-          <a:bodyPr anchorCtr="0" anchor="t" bIns="91425" lIns="91425" spcFirstLastPara="1" rIns="91425" wrap="square" tIns="91425">
+          <a:bodyPr spcFirstLastPara="1" wrap="square" lIns="91425" tIns="91425" rIns="91425" bIns="91425" anchor="t" anchorCtr="0">
             <a:noAutofit/>
           </a:bodyPr>
           <a:lstStyle/>
           <a:p>
-            <a:pPr indent="0" lvl="0" marL="0" rtl="0" algn="l">
+            <a:pPr marL="0" lvl="0" indent="0" algn="l" rtl="0">
               <a:spcBef>
                 <a:spcPts val="0"/>
               </a:spcBef>
@@ -870,9 +898,6 @@
               </a:spcAft>
               <a:buNone/>
             </a:pPr>
-            <a:r>
-              <a:t/>
-            </a:r>
             <a:endParaRPr/>
           </a:p>
         </p:txBody>
@@ -886,11 +911,11 @@
 </file>
 
 <file path=ppt/slideLayouts/slideLayout1.xml><?xml version="1.0" encoding="utf-8"?>
-<p:sldLayout xmlns:a="http://schemas.openxmlformats.org/drawingml/2006/main" xmlns:r="http://schemas.openxmlformats.org/officeDocument/2006/relationships" xmlns:mc="http://schemas.openxmlformats.org/markup-compatibility/2006" xmlns:mv="urn:schemas-microsoft-com:mac:vml" xmlns:p="http://schemas.openxmlformats.org/presentationml/2006/main" xmlns:c="http://schemas.openxmlformats.org/drawingml/2006/chart" xmlns:dgm="http://schemas.openxmlformats.org/drawingml/2006/diagram" xmlns:o="urn:schemas-microsoft-com:office:office" xmlns:v="urn:schemas-microsoft-com:vml" xmlns:pvml="urn:schemas-microsoft-com:office:powerpoint" xmlns:com="http://schemas.openxmlformats.org/drawingml/2006/compatibility" xmlns:p14="http://schemas.microsoft.com/office/powerpoint/2010/main" xmlns:p15="http://schemas.microsoft.com/office/powerpoint/2012/main" xmlns:ahyp="http://schemas.microsoft.com/office/drawing/2018/hyperlinkcolor" matchingName="Title slide" type="title">
+<p:sldLayout xmlns:a="http://schemas.openxmlformats.org/drawingml/2006/main" xmlns:r="http://schemas.openxmlformats.org/officeDocument/2006/relationships" xmlns:p="http://schemas.openxmlformats.org/presentationml/2006/main" matchingName="Title slide" type="title">
   <p:cSld name="TITLE">
     <p:spTree>
       <p:nvGrpSpPr>
-        <p:cNvPr id="9" name="Shape 9"/>
+        <p:cNvPr id="1" name="Shape 9"/>
         <p:cNvGrpSpPr/>
         <p:nvPr/>
       </p:nvGrpSpPr>
@@ -905,7 +930,9 @@
       <p:sp>
         <p:nvSpPr>
           <p:cNvPr id="10" name="Google Shape;10;p2"/>
-          <p:cNvSpPr txBox="1"/>
+          <p:cNvSpPr txBox="1">
+            <a:spLocks noGrp="1"/>
+          </p:cNvSpPr>
           <p:nvPr>
             <p:ph type="ctrTitle"/>
           </p:nvPr>
@@ -920,7 +947,7 @@
           </a:prstGeom>
         </p:spPr>
         <p:txBody>
-          <a:bodyPr anchorCtr="0" anchor="b" bIns="91425" lIns="91425" spcFirstLastPara="1" rIns="91425" wrap="square" tIns="91425">
+          <a:bodyPr spcFirstLastPara="1" wrap="square" lIns="91425" tIns="91425" rIns="91425" bIns="91425" anchor="b" anchorCtr="0">
             <a:normAutofit/>
           </a:bodyPr>
           <a:lstStyle>
@@ -1024,15 +1051,19 @@
               <a:defRPr sz="5200"/>
             </a:lvl9pPr>
           </a:lstStyle>
-          <a:p/>
+          <a:p>
+            <a:endParaRPr/>
+          </a:p>
         </p:txBody>
       </p:sp>
       <p:sp>
         <p:nvSpPr>
           <p:cNvPr id="11" name="Google Shape;11;p2"/>
-          <p:cNvSpPr txBox="1"/>
+          <p:cNvSpPr txBox="1">
+            <a:spLocks noGrp="1"/>
+          </p:cNvSpPr>
           <p:nvPr>
-            <p:ph idx="1" type="subTitle"/>
+            <p:ph type="subTitle" idx="1"/>
           </p:nvPr>
         </p:nvSpPr>
         <p:spPr>
@@ -1045,7 +1076,7 @@
           </a:prstGeom>
         </p:spPr>
         <p:txBody>
-          <a:bodyPr anchorCtr="0" anchor="t" bIns="91425" lIns="91425" spcFirstLastPara="1" rIns="91425" wrap="square" tIns="91425">
+          <a:bodyPr spcFirstLastPara="1" wrap="square" lIns="91425" tIns="91425" rIns="91425" bIns="91425" anchor="t" anchorCtr="0">
             <a:normAutofit/>
           </a:bodyPr>
           <a:lstStyle>
@@ -1176,15 +1207,19 @@
               <a:defRPr sz="2800"/>
             </a:lvl9pPr>
           </a:lstStyle>
-          <a:p/>
+          <a:p>
+            <a:endParaRPr/>
+          </a:p>
         </p:txBody>
       </p:sp>
       <p:sp>
         <p:nvSpPr>
           <p:cNvPr id="12" name="Google Shape;12;p2"/>
-          <p:cNvSpPr txBox="1"/>
+          <p:cNvSpPr txBox="1">
+            <a:spLocks noGrp="1"/>
+          </p:cNvSpPr>
           <p:nvPr>
-            <p:ph idx="12" type="sldNum"/>
+            <p:ph type="sldNum" idx="12"/>
           </p:nvPr>
         </p:nvSpPr>
         <p:spPr>
@@ -1197,7 +1232,7 @@
           </a:prstGeom>
         </p:spPr>
         <p:txBody>
-          <a:bodyPr anchorCtr="0" anchor="ctr" bIns="91425" lIns="91425" spcFirstLastPara="1" rIns="91425" wrap="square" tIns="91425">
+          <a:bodyPr spcFirstLastPara="1" wrap="square" lIns="91425" tIns="91425" rIns="91425" bIns="91425" anchor="ctr" anchorCtr="0">
             <a:normAutofit/>
           </a:bodyPr>
           <a:lstStyle>
@@ -1239,7 +1274,7 @@
             </a:lvl9pPr>
           </a:lstStyle>
           <a:p>
-            <a:pPr indent="0" lvl="0" marL="0" rtl="0" algn="r">
+            <a:pPr marL="0" lvl="0" indent="0" algn="r" rtl="0">
               <a:spcBef>
                 <a:spcPts val="0"/>
               </a:spcBef>
@@ -1265,11 +1300,11 @@
 </file>
 
 <file path=ppt/slideLayouts/slideLayout10.xml><?xml version="1.0" encoding="utf-8"?>
-<p:sldLayout xmlns:a="http://schemas.openxmlformats.org/drawingml/2006/main" xmlns:r="http://schemas.openxmlformats.org/officeDocument/2006/relationships" xmlns:mc="http://schemas.openxmlformats.org/markup-compatibility/2006" xmlns:mv="urn:schemas-microsoft-com:mac:vml" xmlns:p="http://schemas.openxmlformats.org/presentationml/2006/main" xmlns:c="http://schemas.openxmlformats.org/drawingml/2006/chart" xmlns:dgm="http://schemas.openxmlformats.org/drawingml/2006/diagram" xmlns:o="urn:schemas-microsoft-com:office:office" xmlns:v="urn:schemas-microsoft-com:vml" xmlns:pvml="urn:schemas-microsoft-com:office:powerpoint" xmlns:com="http://schemas.openxmlformats.org/drawingml/2006/compatibility" xmlns:p14="http://schemas.microsoft.com/office/powerpoint/2010/main" xmlns:p15="http://schemas.microsoft.com/office/powerpoint/2012/main" xmlns:ahyp="http://schemas.microsoft.com/office/drawing/2018/hyperlinkcolor" matchingName="Big number">
+<p:sldLayout xmlns:a="http://schemas.openxmlformats.org/drawingml/2006/main" xmlns:r="http://schemas.openxmlformats.org/officeDocument/2006/relationships" xmlns:p="http://schemas.openxmlformats.org/presentationml/2006/main" matchingName="Big number">
   <p:cSld name="BIG_NUMBER">
     <p:spTree>
       <p:nvGrpSpPr>
-        <p:cNvPr id="44" name="Shape 44"/>
+        <p:cNvPr id="1" name="Shape 44"/>
         <p:cNvGrpSpPr/>
         <p:nvPr/>
       </p:nvGrpSpPr>
@@ -1284,9 +1319,11 @@
       <p:sp>
         <p:nvSpPr>
           <p:cNvPr id="45" name="Google Shape;45;p11"/>
-          <p:cNvSpPr txBox="1"/>
+          <p:cNvSpPr txBox="1">
+            <a:spLocks noGrp="1"/>
+          </p:cNvSpPr>
           <p:nvPr>
-            <p:ph hasCustomPrompt="1" type="title"/>
+            <p:ph type="title" hasCustomPrompt="1"/>
           </p:nvPr>
         </p:nvSpPr>
         <p:spPr>
@@ -1299,7 +1336,7 @@
           </a:prstGeom>
         </p:spPr>
         <p:txBody>
-          <a:bodyPr anchorCtr="0" anchor="b" bIns="91425" lIns="91425" spcFirstLastPara="1" rIns="91425" wrap="square" tIns="91425">
+          <a:bodyPr spcFirstLastPara="1" wrap="square" lIns="91425" tIns="91425" rIns="91425" bIns="91425" anchor="b" anchorCtr="0">
             <a:normAutofit/>
           </a:bodyPr>
           <a:lstStyle>
@@ -1413,9 +1450,11 @@
       <p:sp>
         <p:nvSpPr>
           <p:cNvPr id="46" name="Google Shape;46;p11"/>
-          <p:cNvSpPr txBox="1"/>
+          <p:cNvSpPr txBox="1">
+            <a:spLocks noGrp="1"/>
+          </p:cNvSpPr>
           <p:nvPr>
-            <p:ph idx="1" type="body"/>
+            <p:ph type="body" idx="1"/>
           </p:nvPr>
         </p:nvSpPr>
         <p:spPr>
@@ -1428,11 +1467,11 @@
           </a:prstGeom>
         </p:spPr>
         <p:txBody>
-          <a:bodyPr anchorCtr="0" anchor="t" bIns="91425" lIns="91425" spcFirstLastPara="1" rIns="91425" wrap="square" tIns="91425">
+          <a:bodyPr spcFirstLastPara="1" wrap="square" lIns="91425" tIns="91425" rIns="91425" bIns="91425" anchor="t" anchorCtr="0">
             <a:normAutofit/>
           </a:bodyPr>
           <a:lstStyle>
-            <a:lvl1pPr indent="-342900" lvl="0" marL="457200" algn="ctr">
+            <a:lvl1pPr marL="457200" lvl="0" indent="-342900" algn="ctr">
               <a:spcBef>
                 <a:spcPts val="0"/>
               </a:spcBef>
@@ -1443,7 +1482,7 @@
               <a:buChar char="●"/>
               <a:defRPr/>
             </a:lvl1pPr>
-            <a:lvl2pPr indent="-317500" lvl="1" marL="914400" algn="ctr">
+            <a:lvl2pPr marL="914400" lvl="1" indent="-317500" algn="ctr">
               <a:spcBef>
                 <a:spcPts val="0"/>
               </a:spcBef>
@@ -1454,7 +1493,7 @@
               <a:buChar char="○"/>
               <a:defRPr/>
             </a:lvl2pPr>
-            <a:lvl3pPr indent="-317500" lvl="2" marL="1371600" algn="ctr">
+            <a:lvl3pPr marL="1371600" lvl="2" indent="-317500" algn="ctr">
               <a:spcBef>
                 <a:spcPts val="0"/>
               </a:spcBef>
@@ -1465,7 +1504,7 @@
               <a:buChar char="■"/>
               <a:defRPr/>
             </a:lvl3pPr>
-            <a:lvl4pPr indent="-317500" lvl="3" marL="1828800" algn="ctr">
+            <a:lvl4pPr marL="1828800" lvl="3" indent="-317500" algn="ctr">
               <a:spcBef>
                 <a:spcPts val="0"/>
               </a:spcBef>
@@ -1476,7 +1515,7 @@
               <a:buChar char="●"/>
               <a:defRPr/>
             </a:lvl4pPr>
-            <a:lvl5pPr indent="-317500" lvl="4" marL="2286000" algn="ctr">
+            <a:lvl5pPr marL="2286000" lvl="4" indent="-317500" algn="ctr">
               <a:spcBef>
                 <a:spcPts val="0"/>
               </a:spcBef>
@@ -1487,7 +1526,7 @@
               <a:buChar char="○"/>
               <a:defRPr/>
             </a:lvl5pPr>
-            <a:lvl6pPr indent="-317500" lvl="5" marL="2743200" algn="ctr">
+            <a:lvl6pPr marL="2743200" lvl="5" indent="-317500" algn="ctr">
               <a:spcBef>
                 <a:spcPts val="0"/>
               </a:spcBef>
@@ -1498,7 +1537,7 @@
               <a:buChar char="■"/>
               <a:defRPr/>
             </a:lvl6pPr>
-            <a:lvl7pPr indent="-317500" lvl="6" marL="3200400" algn="ctr">
+            <a:lvl7pPr marL="3200400" lvl="6" indent="-317500" algn="ctr">
               <a:spcBef>
                 <a:spcPts val="0"/>
               </a:spcBef>
@@ -1509,7 +1548,7 @@
               <a:buChar char="●"/>
               <a:defRPr/>
             </a:lvl7pPr>
-            <a:lvl8pPr indent="-317500" lvl="7" marL="3657600" algn="ctr">
+            <a:lvl8pPr marL="3657600" lvl="7" indent="-317500" algn="ctr">
               <a:spcBef>
                 <a:spcPts val="0"/>
               </a:spcBef>
@@ -1520,7 +1559,7 @@
               <a:buChar char="○"/>
               <a:defRPr/>
             </a:lvl8pPr>
-            <a:lvl9pPr indent="-317500" lvl="8" marL="4114800" algn="ctr">
+            <a:lvl9pPr marL="4114800" lvl="8" indent="-317500" algn="ctr">
               <a:spcBef>
                 <a:spcPts val="0"/>
               </a:spcBef>
@@ -1532,15 +1571,19 @@
               <a:defRPr/>
             </a:lvl9pPr>
           </a:lstStyle>
-          <a:p/>
+          <a:p>
+            <a:endParaRPr/>
+          </a:p>
         </p:txBody>
       </p:sp>
       <p:sp>
         <p:nvSpPr>
           <p:cNvPr id="47" name="Google Shape;47;p11"/>
-          <p:cNvSpPr txBox="1"/>
+          <p:cNvSpPr txBox="1">
+            <a:spLocks noGrp="1"/>
+          </p:cNvSpPr>
           <p:nvPr>
-            <p:ph idx="12" type="sldNum"/>
+            <p:ph type="sldNum" idx="12"/>
           </p:nvPr>
         </p:nvSpPr>
         <p:spPr>
@@ -1553,7 +1596,7 @@
           </a:prstGeom>
         </p:spPr>
         <p:txBody>
-          <a:bodyPr anchorCtr="0" anchor="ctr" bIns="91425" lIns="91425" spcFirstLastPara="1" rIns="91425" wrap="square" tIns="91425">
+          <a:bodyPr spcFirstLastPara="1" wrap="square" lIns="91425" tIns="91425" rIns="91425" bIns="91425" anchor="ctr" anchorCtr="0">
             <a:normAutofit/>
           </a:bodyPr>
           <a:lstStyle>
@@ -1595,7 +1638,7 @@
             </a:lvl9pPr>
           </a:lstStyle>
           <a:p>
-            <a:pPr indent="0" lvl="0" marL="0" rtl="0" algn="r">
+            <a:pPr marL="0" lvl="0" indent="0" algn="r" rtl="0">
               <a:spcBef>
                 <a:spcPts val="0"/>
               </a:spcBef>
@@ -1621,11 +1664,11 @@
 </file>
 
 <file path=ppt/slideLayouts/slideLayout11.xml><?xml version="1.0" encoding="utf-8"?>
-<p:sldLayout xmlns:a="http://schemas.openxmlformats.org/drawingml/2006/main" xmlns:r="http://schemas.openxmlformats.org/officeDocument/2006/relationships" xmlns:mc="http://schemas.openxmlformats.org/markup-compatibility/2006" xmlns:mv="urn:schemas-microsoft-com:mac:vml" xmlns:p="http://schemas.openxmlformats.org/presentationml/2006/main" xmlns:c="http://schemas.openxmlformats.org/drawingml/2006/chart" xmlns:dgm="http://schemas.openxmlformats.org/drawingml/2006/diagram" xmlns:o="urn:schemas-microsoft-com:office:office" xmlns:v="urn:schemas-microsoft-com:vml" xmlns:pvml="urn:schemas-microsoft-com:office:powerpoint" xmlns:com="http://schemas.openxmlformats.org/drawingml/2006/compatibility" xmlns:p14="http://schemas.microsoft.com/office/powerpoint/2010/main" xmlns:p15="http://schemas.microsoft.com/office/powerpoint/2012/main" xmlns:ahyp="http://schemas.microsoft.com/office/drawing/2018/hyperlinkcolor" matchingName="Blank" type="blank">
+<p:sldLayout xmlns:a="http://schemas.openxmlformats.org/drawingml/2006/main" xmlns:r="http://schemas.openxmlformats.org/officeDocument/2006/relationships" xmlns:p="http://schemas.openxmlformats.org/presentationml/2006/main" matchingName="Blank" type="blank">
   <p:cSld name="BLANK">
     <p:spTree>
       <p:nvGrpSpPr>
-        <p:cNvPr id="48" name="Shape 48"/>
+        <p:cNvPr id="1" name="Shape 48"/>
         <p:cNvGrpSpPr/>
         <p:nvPr/>
       </p:nvGrpSpPr>
@@ -1640,9 +1683,11 @@
       <p:sp>
         <p:nvSpPr>
           <p:cNvPr id="49" name="Google Shape;49;p12"/>
-          <p:cNvSpPr txBox="1"/>
+          <p:cNvSpPr txBox="1">
+            <a:spLocks noGrp="1"/>
+          </p:cNvSpPr>
           <p:nvPr>
-            <p:ph idx="12" type="sldNum"/>
+            <p:ph type="sldNum" idx="12"/>
           </p:nvPr>
         </p:nvSpPr>
         <p:spPr>
@@ -1655,7 +1700,7 @@
           </a:prstGeom>
         </p:spPr>
         <p:txBody>
-          <a:bodyPr anchorCtr="0" anchor="ctr" bIns="91425" lIns="91425" spcFirstLastPara="1" rIns="91425" wrap="square" tIns="91425">
+          <a:bodyPr spcFirstLastPara="1" wrap="square" lIns="91425" tIns="91425" rIns="91425" bIns="91425" anchor="ctr" anchorCtr="0">
             <a:normAutofit/>
           </a:bodyPr>
           <a:lstStyle>
@@ -1697,7 +1742,7 @@
             </a:lvl9pPr>
           </a:lstStyle>
           <a:p>
-            <a:pPr indent="0" lvl="0" marL="0" rtl="0" algn="r">
+            <a:pPr marL="0" lvl="0" indent="0" algn="r" rtl="0">
               <a:spcBef>
                 <a:spcPts val="0"/>
               </a:spcBef>
@@ -1723,11 +1768,11 @@
 </file>
 
 <file path=ppt/slideLayouts/slideLayout2.xml><?xml version="1.0" encoding="utf-8"?>
-<p:sldLayout xmlns:a="http://schemas.openxmlformats.org/drawingml/2006/main" xmlns:r="http://schemas.openxmlformats.org/officeDocument/2006/relationships" xmlns:mc="http://schemas.openxmlformats.org/markup-compatibility/2006" xmlns:mv="urn:schemas-microsoft-com:mac:vml" xmlns:p="http://schemas.openxmlformats.org/presentationml/2006/main" xmlns:c="http://schemas.openxmlformats.org/drawingml/2006/chart" xmlns:dgm="http://schemas.openxmlformats.org/drawingml/2006/diagram" xmlns:o="urn:schemas-microsoft-com:office:office" xmlns:v="urn:schemas-microsoft-com:vml" xmlns:pvml="urn:schemas-microsoft-com:office:powerpoint" xmlns:com="http://schemas.openxmlformats.org/drawingml/2006/compatibility" xmlns:p14="http://schemas.microsoft.com/office/powerpoint/2010/main" xmlns:p15="http://schemas.microsoft.com/office/powerpoint/2012/main" xmlns:ahyp="http://schemas.microsoft.com/office/drawing/2018/hyperlinkcolor" matchingName="Section header" type="secHead">
+<p:sldLayout xmlns:a="http://schemas.openxmlformats.org/drawingml/2006/main" xmlns:r="http://schemas.openxmlformats.org/officeDocument/2006/relationships" xmlns:p="http://schemas.openxmlformats.org/presentationml/2006/main" matchingName="Section header" type="secHead">
   <p:cSld name="SECTION_HEADER">
     <p:spTree>
       <p:nvGrpSpPr>
-        <p:cNvPr id="13" name="Shape 13"/>
+        <p:cNvPr id="1" name="Shape 13"/>
         <p:cNvGrpSpPr/>
         <p:nvPr/>
       </p:nvGrpSpPr>
@@ -1742,7 +1787,9 @@
       <p:sp>
         <p:nvSpPr>
           <p:cNvPr id="14" name="Google Shape;14;p3"/>
-          <p:cNvSpPr txBox="1"/>
+          <p:cNvSpPr txBox="1">
+            <a:spLocks noGrp="1"/>
+          </p:cNvSpPr>
           <p:nvPr>
             <p:ph type="title"/>
           </p:nvPr>
@@ -1757,7 +1804,7 @@
           </a:prstGeom>
         </p:spPr>
         <p:txBody>
-          <a:bodyPr anchorCtr="0" anchor="ctr" bIns="91425" lIns="91425" spcFirstLastPara="1" rIns="91425" wrap="square" tIns="91425">
+          <a:bodyPr spcFirstLastPara="1" wrap="square" lIns="91425" tIns="91425" rIns="91425" bIns="91425" anchor="ctr" anchorCtr="0">
             <a:normAutofit/>
           </a:bodyPr>
           <a:lstStyle>
@@ -1861,15 +1908,19 @@
               <a:defRPr sz="3600"/>
             </a:lvl9pPr>
           </a:lstStyle>
-          <a:p/>
+          <a:p>
+            <a:endParaRPr/>
+          </a:p>
         </p:txBody>
       </p:sp>
       <p:sp>
         <p:nvSpPr>
           <p:cNvPr id="15" name="Google Shape;15;p3"/>
-          <p:cNvSpPr txBox="1"/>
+          <p:cNvSpPr txBox="1">
+            <a:spLocks noGrp="1"/>
+          </p:cNvSpPr>
           <p:nvPr>
-            <p:ph idx="12" type="sldNum"/>
+            <p:ph type="sldNum" idx="12"/>
           </p:nvPr>
         </p:nvSpPr>
         <p:spPr>
@@ -1882,7 +1933,7 @@
           </a:prstGeom>
         </p:spPr>
         <p:txBody>
-          <a:bodyPr anchorCtr="0" anchor="ctr" bIns="91425" lIns="91425" spcFirstLastPara="1" rIns="91425" wrap="square" tIns="91425">
+          <a:bodyPr spcFirstLastPara="1" wrap="square" lIns="91425" tIns="91425" rIns="91425" bIns="91425" anchor="ctr" anchorCtr="0">
             <a:normAutofit/>
           </a:bodyPr>
           <a:lstStyle>
@@ -1924,7 +1975,7 @@
             </a:lvl9pPr>
           </a:lstStyle>
           <a:p>
-            <a:pPr indent="0" lvl="0" marL="0" rtl="0" algn="r">
+            <a:pPr marL="0" lvl="0" indent="0" algn="r" rtl="0">
               <a:spcBef>
                 <a:spcPts val="0"/>
               </a:spcBef>
@@ -1950,11 +2001,11 @@
 </file>
 
 <file path=ppt/slideLayouts/slideLayout3.xml><?xml version="1.0" encoding="utf-8"?>
-<p:sldLayout xmlns:a="http://schemas.openxmlformats.org/drawingml/2006/main" xmlns:r="http://schemas.openxmlformats.org/officeDocument/2006/relationships" xmlns:mc="http://schemas.openxmlformats.org/markup-compatibility/2006" xmlns:mv="urn:schemas-microsoft-com:mac:vml" xmlns:p="http://schemas.openxmlformats.org/presentationml/2006/main" xmlns:c="http://schemas.openxmlformats.org/drawingml/2006/chart" xmlns:dgm="http://schemas.openxmlformats.org/drawingml/2006/diagram" xmlns:o="urn:schemas-microsoft-com:office:office" xmlns:v="urn:schemas-microsoft-com:vml" xmlns:pvml="urn:schemas-microsoft-com:office:powerpoint" xmlns:com="http://schemas.openxmlformats.org/drawingml/2006/compatibility" xmlns:p14="http://schemas.microsoft.com/office/powerpoint/2010/main" xmlns:p15="http://schemas.microsoft.com/office/powerpoint/2012/main" xmlns:ahyp="http://schemas.microsoft.com/office/drawing/2018/hyperlinkcolor" matchingName="Title and body" type="tx">
+<p:sldLayout xmlns:a="http://schemas.openxmlformats.org/drawingml/2006/main" xmlns:r="http://schemas.openxmlformats.org/officeDocument/2006/relationships" xmlns:p="http://schemas.openxmlformats.org/presentationml/2006/main" matchingName="Title and body" type="tx">
   <p:cSld name="TITLE_AND_BODY">
     <p:spTree>
       <p:nvGrpSpPr>
-        <p:cNvPr id="16" name="Shape 16"/>
+        <p:cNvPr id="1" name="Shape 16"/>
         <p:cNvGrpSpPr/>
         <p:nvPr/>
       </p:nvGrpSpPr>
@@ -1969,7 +2020,9 @@
       <p:sp>
         <p:nvSpPr>
           <p:cNvPr id="17" name="Google Shape;17;p4"/>
-          <p:cNvSpPr txBox="1"/>
+          <p:cNvSpPr txBox="1">
+            <a:spLocks noGrp="1"/>
+          </p:cNvSpPr>
           <p:nvPr>
             <p:ph type="title"/>
           </p:nvPr>
@@ -1984,7 +2037,7 @@
           </a:prstGeom>
         </p:spPr>
         <p:txBody>
-          <a:bodyPr anchorCtr="0" anchor="t" bIns="91425" lIns="91425" spcFirstLastPara="1" rIns="91425" wrap="square" tIns="91425">
+          <a:bodyPr spcFirstLastPara="1" wrap="square" lIns="91425" tIns="91425" rIns="91425" bIns="91425" anchor="t" anchorCtr="0">
             <a:normAutofit/>
           </a:bodyPr>
           <a:lstStyle>
@@ -2088,15 +2141,19 @@
               <a:defRPr/>
             </a:lvl9pPr>
           </a:lstStyle>
-          <a:p/>
+          <a:p>
+            <a:endParaRPr/>
+          </a:p>
         </p:txBody>
       </p:sp>
       <p:sp>
         <p:nvSpPr>
           <p:cNvPr id="18" name="Google Shape;18;p4"/>
-          <p:cNvSpPr txBox="1"/>
+          <p:cNvSpPr txBox="1">
+            <a:spLocks noGrp="1"/>
+          </p:cNvSpPr>
           <p:nvPr>
-            <p:ph idx="1" type="body"/>
+            <p:ph type="body" idx="1"/>
           </p:nvPr>
         </p:nvSpPr>
         <p:spPr>
@@ -2109,11 +2166,11 @@
           </a:prstGeom>
         </p:spPr>
         <p:txBody>
-          <a:bodyPr anchorCtr="0" anchor="t" bIns="91425" lIns="91425" spcFirstLastPara="1" rIns="91425" wrap="square" tIns="91425">
+          <a:bodyPr spcFirstLastPara="1" wrap="square" lIns="91425" tIns="91425" rIns="91425" bIns="91425" anchor="t" anchorCtr="0">
             <a:normAutofit/>
           </a:bodyPr>
           <a:lstStyle>
-            <a:lvl1pPr indent="-342900" lvl="0" marL="457200">
+            <a:lvl1pPr marL="457200" lvl="0" indent="-342900">
               <a:spcBef>
                 <a:spcPts val="0"/>
               </a:spcBef>
@@ -2124,7 +2181,7 @@
               <a:buChar char="●"/>
               <a:defRPr/>
             </a:lvl1pPr>
-            <a:lvl2pPr indent="-317500" lvl="1" marL="914400">
+            <a:lvl2pPr marL="914400" lvl="1" indent="-317500">
               <a:spcBef>
                 <a:spcPts val="0"/>
               </a:spcBef>
@@ -2135,7 +2192,7 @@
               <a:buChar char="○"/>
               <a:defRPr/>
             </a:lvl2pPr>
-            <a:lvl3pPr indent="-317500" lvl="2" marL="1371600">
+            <a:lvl3pPr marL="1371600" lvl="2" indent="-317500">
               <a:spcBef>
                 <a:spcPts val="0"/>
               </a:spcBef>
@@ -2146,7 +2203,7 @@
               <a:buChar char="■"/>
               <a:defRPr/>
             </a:lvl3pPr>
-            <a:lvl4pPr indent="-317500" lvl="3" marL="1828800">
+            <a:lvl4pPr marL="1828800" lvl="3" indent="-317500">
               <a:spcBef>
                 <a:spcPts val="0"/>
               </a:spcBef>
@@ -2157,7 +2214,7 @@
               <a:buChar char="●"/>
               <a:defRPr/>
             </a:lvl4pPr>
-            <a:lvl5pPr indent="-317500" lvl="4" marL="2286000">
+            <a:lvl5pPr marL="2286000" lvl="4" indent="-317500">
               <a:spcBef>
                 <a:spcPts val="0"/>
               </a:spcBef>
@@ -2168,7 +2225,7 @@
               <a:buChar char="○"/>
               <a:defRPr/>
             </a:lvl5pPr>
-            <a:lvl6pPr indent="-317500" lvl="5" marL="2743200">
+            <a:lvl6pPr marL="2743200" lvl="5" indent="-317500">
               <a:spcBef>
                 <a:spcPts val="0"/>
               </a:spcBef>
@@ -2179,7 +2236,7 @@
               <a:buChar char="■"/>
               <a:defRPr/>
             </a:lvl6pPr>
-            <a:lvl7pPr indent="-317500" lvl="6" marL="3200400">
+            <a:lvl7pPr marL="3200400" lvl="6" indent="-317500">
               <a:spcBef>
                 <a:spcPts val="0"/>
               </a:spcBef>
@@ -2190,7 +2247,7 @@
               <a:buChar char="●"/>
               <a:defRPr/>
             </a:lvl7pPr>
-            <a:lvl8pPr indent="-317500" lvl="7" marL="3657600">
+            <a:lvl8pPr marL="3657600" lvl="7" indent="-317500">
               <a:spcBef>
                 <a:spcPts val="0"/>
               </a:spcBef>
@@ -2201,7 +2258,7 @@
               <a:buChar char="○"/>
               <a:defRPr/>
             </a:lvl8pPr>
-            <a:lvl9pPr indent="-317500" lvl="8" marL="4114800">
+            <a:lvl9pPr marL="4114800" lvl="8" indent="-317500">
               <a:spcBef>
                 <a:spcPts val="0"/>
               </a:spcBef>
@@ -2213,15 +2270,19 @@
               <a:defRPr/>
             </a:lvl9pPr>
           </a:lstStyle>
-          <a:p/>
+          <a:p>
+            <a:endParaRPr/>
+          </a:p>
         </p:txBody>
       </p:sp>
       <p:sp>
         <p:nvSpPr>
           <p:cNvPr id="19" name="Google Shape;19;p4"/>
-          <p:cNvSpPr txBox="1"/>
+          <p:cNvSpPr txBox="1">
+            <a:spLocks noGrp="1"/>
+          </p:cNvSpPr>
           <p:nvPr>
-            <p:ph idx="12" type="sldNum"/>
+            <p:ph type="sldNum" idx="12"/>
           </p:nvPr>
         </p:nvSpPr>
         <p:spPr>
@@ -2234,7 +2295,7 @@
           </a:prstGeom>
         </p:spPr>
         <p:txBody>
-          <a:bodyPr anchorCtr="0" anchor="ctr" bIns="91425" lIns="91425" spcFirstLastPara="1" rIns="91425" wrap="square" tIns="91425">
+          <a:bodyPr spcFirstLastPara="1" wrap="square" lIns="91425" tIns="91425" rIns="91425" bIns="91425" anchor="ctr" anchorCtr="0">
             <a:normAutofit/>
           </a:bodyPr>
           <a:lstStyle>
@@ -2276,7 +2337,7 @@
             </a:lvl9pPr>
           </a:lstStyle>
           <a:p>
-            <a:pPr indent="0" lvl="0" marL="0" rtl="0" algn="r">
+            <a:pPr marL="0" lvl="0" indent="0" algn="r" rtl="0">
               <a:spcBef>
                 <a:spcPts val="0"/>
               </a:spcBef>
@@ -2302,11 +2363,11 @@
 </file>
 
 <file path=ppt/slideLayouts/slideLayout4.xml><?xml version="1.0" encoding="utf-8"?>
-<p:sldLayout xmlns:a="http://schemas.openxmlformats.org/drawingml/2006/main" xmlns:r="http://schemas.openxmlformats.org/officeDocument/2006/relationships" xmlns:mc="http://schemas.openxmlformats.org/markup-compatibility/2006" xmlns:mv="urn:schemas-microsoft-com:mac:vml" xmlns:p="http://schemas.openxmlformats.org/presentationml/2006/main" xmlns:c="http://schemas.openxmlformats.org/drawingml/2006/chart" xmlns:dgm="http://schemas.openxmlformats.org/drawingml/2006/diagram" xmlns:o="urn:schemas-microsoft-com:office:office" xmlns:v="urn:schemas-microsoft-com:vml" xmlns:pvml="urn:schemas-microsoft-com:office:powerpoint" xmlns:com="http://schemas.openxmlformats.org/drawingml/2006/compatibility" xmlns:p14="http://schemas.microsoft.com/office/powerpoint/2010/main" xmlns:p15="http://schemas.microsoft.com/office/powerpoint/2012/main" xmlns:ahyp="http://schemas.microsoft.com/office/drawing/2018/hyperlinkcolor" matchingName="Title and two columns" type="twoColTx">
+<p:sldLayout xmlns:a="http://schemas.openxmlformats.org/drawingml/2006/main" xmlns:r="http://schemas.openxmlformats.org/officeDocument/2006/relationships" xmlns:p="http://schemas.openxmlformats.org/presentationml/2006/main" matchingName="Title and two columns" type="twoColTx">
   <p:cSld name="TITLE_AND_TWO_COLUMNS">
     <p:spTree>
       <p:nvGrpSpPr>
-        <p:cNvPr id="20" name="Shape 20"/>
+        <p:cNvPr id="1" name="Shape 20"/>
         <p:cNvGrpSpPr/>
         <p:nvPr/>
       </p:nvGrpSpPr>
@@ -2321,7 +2382,9 @@
       <p:sp>
         <p:nvSpPr>
           <p:cNvPr id="21" name="Google Shape;21;p5"/>
-          <p:cNvSpPr txBox="1"/>
+          <p:cNvSpPr txBox="1">
+            <a:spLocks noGrp="1"/>
+          </p:cNvSpPr>
           <p:nvPr>
             <p:ph type="title"/>
           </p:nvPr>
@@ -2336,7 +2399,7 @@
           </a:prstGeom>
         </p:spPr>
         <p:txBody>
-          <a:bodyPr anchorCtr="0" anchor="t" bIns="91425" lIns="91425" spcFirstLastPara="1" rIns="91425" wrap="square" tIns="91425">
+          <a:bodyPr spcFirstLastPara="1" wrap="square" lIns="91425" tIns="91425" rIns="91425" bIns="91425" anchor="t" anchorCtr="0">
             <a:normAutofit/>
           </a:bodyPr>
           <a:lstStyle>
@@ -2440,15 +2503,19 @@
               <a:defRPr/>
             </a:lvl9pPr>
           </a:lstStyle>
-          <a:p/>
+          <a:p>
+            <a:endParaRPr/>
+          </a:p>
         </p:txBody>
       </p:sp>
       <p:sp>
         <p:nvSpPr>
           <p:cNvPr id="22" name="Google Shape;22;p5"/>
-          <p:cNvSpPr txBox="1"/>
+          <p:cNvSpPr txBox="1">
+            <a:spLocks noGrp="1"/>
+          </p:cNvSpPr>
           <p:nvPr>
-            <p:ph idx="1" type="body"/>
+            <p:ph type="body" idx="1"/>
           </p:nvPr>
         </p:nvSpPr>
         <p:spPr>
@@ -2461,11 +2528,11 @@
           </a:prstGeom>
         </p:spPr>
         <p:txBody>
-          <a:bodyPr anchorCtr="0" anchor="t" bIns="91425" lIns="91425" spcFirstLastPara="1" rIns="91425" wrap="square" tIns="91425">
+          <a:bodyPr spcFirstLastPara="1" wrap="square" lIns="91425" tIns="91425" rIns="91425" bIns="91425" anchor="t" anchorCtr="0">
             <a:normAutofit/>
           </a:bodyPr>
           <a:lstStyle>
-            <a:lvl1pPr indent="-317500" lvl="0" marL="457200">
+            <a:lvl1pPr marL="457200" lvl="0" indent="-317500">
               <a:spcBef>
                 <a:spcPts val="0"/>
               </a:spcBef>
@@ -2476,7 +2543,7 @@
               <a:buChar char="●"/>
               <a:defRPr sz="1400"/>
             </a:lvl1pPr>
-            <a:lvl2pPr indent="-304800" lvl="1" marL="914400">
+            <a:lvl2pPr marL="914400" lvl="1" indent="-304800">
               <a:spcBef>
                 <a:spcPts val="0"/>
               </a:spcBef>
@@ -2487,7 +2554,7 @@
               <a:buChar char="○"/>
               <a:defRPr sz="1200"/>
             </a:lvl2pPr>
-            <a:lvl3pPr indent="-304800" lvl="2" marL="1371600">
+            <a:lvl3pPr marL="1371600" lvl="2" indent="-304800">
               <a:spcBef>
                 <a:spcPts val="0"/>
               </a:spcBef>
@@ -2498,7 +2565,7 @@
               <a:buChar char="■"/>
               <a:defRPr sz="1200"/>
             </a:lvl3pPr>
-            <a:lvl4pPr indent="-304800" lvl="3" marL="1828800">
+            <a:lvl4pPr marL="1828800" lvl="3" indent="-304800">
               <a:spcBef>
                 <a:spcPts val="0"/>
               </a:spcBef>
@@ -2509,7 +2576,7 @@
               <a:buChar char="●"/>
               <a:defRPr sz="1200"/>
             </a:lvl4pPr>
-            <a:lvl5pPr indent="-304800" lvl="4" marL="2286000">
+            <a:lvl5pPr marL="2286000" lvl="4" indent="-304800">
               <a:spcBef>
                 <a:spcPts val="0"/>
               </a:spcBef>
@@ -2520,7 +2587,7 @@
               <a:buChar char="○"/>
               <a:defRPr sz="1200"/>
             </a:lvl5pPr>
-            <a:lvl6pPr indent="-304800" lvl="5" marL="2743200">
+            <a:lvl6pPr marL="2743200" lvl="5" indent="-304800">
               <a:spcBef>
                 <a:spcPts val="0"/>
               </a:spcBef>
@@ -2531,7 +2598,7 @@
               <a:buChar char="■"/>
               <a:defRPr sz="1200"/>
             </a:lvl6pPr>
-            <a:lvl7pPr indent="-304800" lvl="6" marL="3200400">
+            <a:lvl7pPr marL="3200400" lvl="6" indent="-304800">
               <a:spcBef>
                 <a:spcPts val="0"/>
               </a:spcBef>
@@ -2542,7 +2609,7 @@
               <a:buChar char="●"/>
               <a:defRPr sz="1200"/>
             </a:lvl7pPr>
-            <a:lvl8pPr indent="-304800" lvl="7" marL="3657600">
+            <a:lvl8pPr marL="3657600" lvl="7" indent="-304800">
               <a:spcBef>
                 <a:spcPts val="0"/>
               </a:spcBef>
@@ -2553,7 +2620,7 @@
               <a:buChar char="○"/>
               <a:defRPr sz="1200"/>
             </a:lvl8pPr>
-            <a:lvl9pPr indent="-304800" lvl="8" marL="4114800">
+            <a:lvl9pPr marL="4114800" lvl="8" indent="-304800">
               <a:spcBef>
                 <a:spcPts val="0"/>
               </a:spcBef>
@@ -2565,15 +2632,19 @@
               <a:defRPr sz="1200"/>
             </a:lvl9pPr>
           </a:lstStyle>
-          <a:p/>
+          <a:p>
+            <a:endParaRPr/>
+          </a:p>
         </p:txBody>
       </p:sp>
       <p:sp>
         <p:nvSpPr>
           <p:cNvPr id="23" name="Google Shape;23;p5"/>
-          <p:cNvSpPr txBox="1"/>
+          <p:cNvSpPr txBox="1">
+            <a:spLocks noGrp="1"/>
+          </p:cNvSpPr>
           <p:nvPr>
-            <p:ph idx="2" type="body"/>
+            <p:ph type="body" idx="2"/>
           </p:nvPr>
         </p:nvSpPr>
         <p:spPr>
@@ -2586,11 +2657,11 @@
           </a:prstGeom>
         </p:spPr>
         <p:txBody>
-          <a:bodyPr anchorCtr="0" anchor="t" bIns="91425" lIns="91425" spcFirstLastPara="1" rIns="91425" wrap="square" tIns="91425">
+          <a:bodyPr spcFirstLastPara="1" wrap="square" lIns="91425" tIns="91425" rIns="91425" bIns="91425" anchor="t" anchorCtr="0">
             <a:normAutofit/>
           </a:bodyPr>
           <a:lstStyle>
-            <a:lvl1pPr indent="-317500" lvl="0" marL="457200">
+            <a:lvl1pPr marL="457200" lvl="0" indent="-317500">
               <a:spcBef>
                 <a:spcPts val="0"/>
               </a:spcBef>
@@ -2601,7 +2672,7 @@
               <a:buChar char="●"/>
               <a:defRPr sz="1400"/>
             </a:lvl1pPr>
-            <a:lvl2pPr indent="-304800" lvl="1" marL="914400">
+            <a:lvl2pPr marL="914400" lvl="1" indent="-304800">
               <a:spcBef>
                 <a:spcPts val="0"/>
               </a:spcBef>
@@ -2612,7 +2683,7 @@
               <a:buChar char="○"/>
               <a:defRPr sz="1200"/>
             </a:lvl2pPr>
-            <a:lvl3pPr indent="-304800" lvl="2" marL="1371600">
+            <a:lvl3pPr marL="1371600" lvl="2" indent="-304800">
               <a:spcBef>
                 <a:spcPts val="0"/>
               </a:spcBef>
@@ -2623,7 +2694,7 @@
               <a:buChar char="■"/>
               <a:defRPr sz="1200"/>
             </a:lvl3pPr>
-            <a:lvl4pPr indent="-304800" lvl="3" marL="1828800">
+            <a:lvl4pPr marL="1828800" lvl="3" indent="-304800">
               <a:spcBef>
                 <a:spcPts val="0"/>
               </a:spcBef>
@@ -2634,7 +2705,7 @@
               <a:buChar char="●"/>
               <a:defRPr sz="1200"/>
             </a:lvl4pPr>
-            <a:lvl5pPr indent="-304800" lvl="4" marL="2286000">
+            <a:lvl5pPr marL="2286000" lvl="4" indent="-304800">
               <a:spcBef>
                 <a:spcPts val="0"/>
               </a:spcBef>
@@ -2645,7 +2716,7 @@
               <a:buChar char="○"/>
               <a:defRPr sz="1200"/>
             </a:lvl5pPr>
-            <a:lvl6pPr indent="-304800" lvl="5" marL="2743200">
+            <a:lvl6pPr marL="2743200" lvl="5" indent="-304800">
               <a:spcBef>
                 <a:spcPts val="0"/>
               </a:spcBef>
@@ -2656,7 +2727,7 @@
               <a:buChar char="■"/>
               <a:defRPr sz="1200"/>
             </a:lvl6pPr>
-            <a:lvl7pPr indent="-304800" lvl="6" marL="3200400">
+            <a:lvl7pPr marL="3200400" lvl="6" indent="-304800">
               <a:spcBef>
                 <a:spcPts val="0"/>
               </a:spcBef>
@@ -2667,7 +2738,7 @@
               <a:buChar char="●"/>
               <a:defRPr sz="1200"/>
             </a:lvl7pPr>
-            <a:lvl8pPr indent="-304800" lvl="7" marL="3657600">
+            <a:lvl8pPr marL="3657600" lvl="7" indent="-304800">
               <a:spcBef>
                 <a:spcPts val="0"/>
               </a:spcBef>
@@ -2678,7 +2749,7 @@
               <a:buChar char="○"/>
               <a:defRPr sz="1200"/>
             </a:lvl8pPr>
-            <a:lvl9pPr indent="-304800" lvl="8" marL="4114800">
+            <a:lvl9pPr marL="4114800" lvl="8" indent="-304800">
               <a:spcBef>
                 <a:spcPts val="0"/>
               </a:spcBef>
@@ -2690,15 +2761,19 @@
               <a:defRPr sz="1200"/>
             </a:lvl9pPr>
           </a:lstStyle>
-          <a:p/>
+          <a:p>
+            <a:endParaRPr/>
+          </a:p>
         </p:txBody>
       </p:sp>
       <p:sp>
         <p:nvSpPr>
           <p:cNvPr id="24" name="Google Shape;24;p5"/>
-          <p:cNvSpPr txBox="1"/>
+          <p:cNvSpPr txBox="1">
+            <a:spLocks noGrp="1"/>
+          </p:cNvSpPr>
           <p:nvPr>
-            <p:ph idx="12" type="sldNum"/>
+            <p:ph type="sldNum" idx="12"/>
           </p:nvPr>
         </p:nvSpPr>
         <p:spPr>
@@ -2711,7 +2786,7 @@
           </a:prstGeom>
         </p:spPr>
         <p:txBody>
-          <a:bodyPr anchorCtr="0" anchor="ctr" bIns="91425" lIns="91425" spcFirstLastPara="1" rIns="91425" wrap="square" tIns="91425">
+          <a:bodyPr spcFirstLastPara="1" wrap="square" lIns="91425" tIns="91425" rIns="91425" bIns="91425" anchor="ctr" anchorCtr="0">
             <a:normAutofit/>
           </a:bodyPr>
           <a:lstStyle>
@@ -2753,7 +2828,7 @@
             </a:lvl9pPr>
           </a:lstStyle>
           <a:p>
-            <a:pPr indent="0" lvl="0" marL="0" rtl="0" algn="r">
+            <a:pPr marL="0" lvl="0" indent="0" algn="r" rtl="0">
               <a:spcBef>
                 <a:spcPts val="0"/>
               </a:spcBef>
@@ -2779,11 +2854,11 @@
 </file>
 
 <file path=ppt/slideLayouts/slideLayout5.xml><?xml version="1.0" encoding="utf-8"?>
-<p:sldLayout xmlns:a="http://schemas.openxmlformats.org/drawingml/2006/main" xmlns:r="http://schemas.openxmlformats.org/officeDocument/2006/relationships" xmlns:mc="http://schemas.openxmlformats.org/markup-compatibility/2006" xmlns:mv="urn:schemas-microsoft-com:mac:vml" xmlns:p="http://schemas.openxmlformats.org/presentationml/2006/main" xmlns:c="http://schemas.openxmlformats.org/drawingml/2006/chart" xmlns:dgm="http://schemas.openxmlformats.org/drawingml/2006/diagram" xmlns:o="urn:schemas-microsoft-com:office:office" xmlns:v="urn:schemas-microsoft-com:vml" xmlns:pvml="urn:schemas-microsoft-com:office:powerpoint" xmlns:com="http://schemas.openxmlformats.org/drawingml/2006/compatibility" xmlns:p14="http://schemas.microsoft.com/office/powerpoint/2010/main" xmlns:p15="http://schemas.microsoft.com/office/powerpoint/2012/main" xmlns:ahyp="http://schemas.microsoft.com/office/drawing/2018/hyperlinkcolor" matchingName="Title only" type="titleOnly">
+<p:sldLayout xmlns:a="http://schemas.openxmlformats.org/drawingml/2006/main" xmlns:r="http://schemas.openxmlformats.org/officeDocument/2006/relationships" xmlns:p="http://schemas.openxmlformats.org/presentationml/2006/main" matchingName="Title only" type="titleOnly">
   <p:cSld name="TITLE_ONLY">
     <p:spTree>
       <p:nvGrpSpPr>
-        <p:cNvPr id="25" name="Shape 25"/>
+        <p:cNvPr id="1" name="Shape 25"/>
         <p:cNvGrpSpPr/>
         <p:nvPr/>
       </p:nvGrpSpPr>
@@ -2798,7 +2873,9 @@
       <p:sp>
         <p:nvSpPr>
           <p:cNvPr id="26" name="Google Shape;26;p6"/>
-          <p:cNvSpPr txBox="1"/>
+          <p:cNvSpPr txBox="1">
+            <a:spLocks noGrp="1"/>
+          </p:cNvSpPr>
           <p:nvPr>
             <p:ph type="title"/>
           </p:nvPr>
@@ -2813,7 +2890,7 @@
           </a:prstGeom>
         </p:spPr>
         <p:txBody>
-          <a:bodyPr anchorCtr="0" anchor="t" bIns="91425" lIns="91425" spcFirstLastPara="1" rIns="91425" wrap="square" tIns="91425">
+          <a:bodyPr spcFirstLastPara="1" wrap="square" lIns="91425" tIns="91425" rIns="91425" bIns="91425" anchor="t" anchorCtr="0">
             <a:normAutofit/>
           </a:bodyPr>
           <a:lstStyle>
@@ -2917,15 +2994,19 @@
               <a:defRPr/>
             </a:lvl9pPr>
           </a:lstStyle>
-          <a:p/>
+          <a:p>
+            <a:endParaRPr/>
+          </a:p>
         </p:txBody>
       </p:sp>
       <p:sp>
         <p:nvSpPr>
           <p:cNvPr id="27" name="Google Shape;27;p6"/>
-          <p:cNvSpPr txBox="1"/>
+          <p:cNvSpPr txBox="1">
+            <a:spLocks noGrp="1"/>
+          </p:cNvSpPr>
           <p:nvPr>
-            <p:ph idx="12" type="sldNum"/>
+            <p:ph type="sldNum" idx="12"/>
           </p:nvPr>
         </p:nvSpPr>
         <p:spPr>
@@ -2938,7 +3019,7 @@
           </a:prstGeom>
         </p:spPr>
         <p:txBody>
-          <a:bodyPr anchorCtr="0" anchor="ctr" bIns="91425" lIns="91425" spcFirstLastPara="1" rIns="91425" wrap="square" tIns="91425">
+          <a:bodyPr spcFirstLastPara="1" wrap="square" lIns="91425" tIns="91425" rIns="91425" bIns="91425" anchor="ctr" anchorCtr="0">
             <a:normAutofit/>
           </a:bodyPr>
           <a:lstStyle>
@@ -2980,7 +3061,7 @@
             </a:lvl9pPr>
           </a:lstStyle>
           <a:p>
-            <a:pPr indent="0" lvl="0" marL="0" rtl="0" algn="r">
+            <a:pPr marL="0" lvl="0" indent="0" algn="r" rtl="0">
               <a:spcBef>
                 <a:spcPts val="0"/>
               </a:spcBef>
@@ -3006,11 +3087,11 @@
 </file>
 
 <file path=ppt/slideLayouts/slideLayout6.xml><?xml version="1.0" encoding="utf-8"?>
-<p:sldLayout xmlns:a="http://schemas.openxmlformats.org/drawingml/2006/main" xmlns:r="http://schemas.openxmlformats.org/officeDocument/2006/relationships" xmlns:mc="http://schemas.openxmlformats.org/markup-compatibility/2006" xmlns:mv="urn:schemas-microsoft-com:mac:vml" xmlns:p="http://schemas.openxmlformats.org/presentationml/2006/main" xmlns:c="http://schemas.openxmlformats.org/drawingml/2006/chart" xmlns:dgm="http://schemas.openxmlformats.org/drawingml/2006/diagram" xmlns:o="urn:schemas-microsoft-com:office:office" xmlns:v="urn:schemas-microsoft-com:vml" xmlns:pvml="urn:schemas-microsoft-com:office:powerpoint" xmlns:com="http://schemas.openxmlformats.org/drawingml/2006/compatibility" xmlns:p14="http://schemas.microsoft.com/office/powerpoint/2010/main" xmlns:p15="http://schemas.microsoft.com/office/powerpoint/2012/main" xmlns:ahyp="http://schemas.microsoft.com/office/drawing/2018/hyperlinkcolor" matchingName="One column text">
+<p:sldLayout xmlns:a="http://schemas.openxmlformats.org/drawingml/2006/main" xmlns:r="http://schemas.openxmlformats.org/officeDocument/2006/relationships" xmlns:p="http://schemas.openxmlformats.org/presentationml/2006/main" matchingName="One column text">
   <p:cSld name="ONE_COLUMN_TEXT">
     <p:spTree>
       <p:nvGrpSpPr>
-        <p:cNvPr id="28" name="Shape 28"/>
+        <p:cNvPr id="1" name="Shape 28"/>
         <p:cNvGrpSpPr/>
         <p:nvPr/>
       </p:nvGrpSpPr>
@@ -3025,7 +3106,9 @@
       <p:sp>
         <p:nvSpPr>
           <p:cNvPr id="29" name="Google Shape;29;p7"/>
-          <p:cNvSpPr txBox="1"/>
+          <p:cNvSpPr txBox="1">
+            <a:spLocks noGrp="1"/>
+          </p:cNvSpPr>
           <p:nvPr>
             <p:ph type="title"/>
           </p:nvPr>
@@ -3040,7 +3123,7 @@
           </a:prstGeom>
         </p:spPr>
         <p:txBody>
-          <a:bodyPr anchorCtr="0" anchor="b" bIns="91425" lIns="91425" spcFirstLastPara="1" rIns="91425" wrap="square" tIns="91425">
+          <a:bodyPr spcFirstLastPara="1" wrap="square" lIns="91425" tIns="91425" rIns="91425" bIns="91425" anchor="b" anchorCtr="0">
             <a:normAutofit/>
           </a:bodyPr>
           <a:lstStyle>
@@ -3144,15 +3227,19 @@
               <a:defRPr sz="2400"/>
             </a:lvl9pPr>
           </a:lstStyle>
-          <a:p/>
+          <a:p>
+            <a:endParaRPr/>
+          </a:p>
         </p:txBody>
       </p:sp>
       <p:sp>
         <p:nvSpPr>
           <p:cNvPr id="30" name="Google Shape;30;p7"/>
-          <p:cNvSpPr txBox="1"/>
+          <p:cNvSpPr txBox="1">
+            <a:spLocks noGrp="1"/>
+          </p:cNvSpPr>
           <p:nvPr>
-            <p:ph idx="1" type="body"/>
+            <p:ph type="body" idx="1"/>
           </p:nvPr>
         </p:nvSpPr>
         <p:spPr>
@@ -3165,11 +3252,11 @@
           </a:prstGeom>
         </p:spPr>
         <p:txBody>
-          <a:bodyPr anchorCtr="0" anchor="t" bIns="91425" lIns="91425" spcFirstLastPara="1" rIns="91425" wrap="square" tIns="91425">
+          <a:bodyPr spcFirstLastPara="1" wrap="square" lIns="91425" tIns="91425" rIns="91425" bIns="91425" anchor="t" anchorCtr="0">
             <a:normAutofit/>
           </a:bodyPr>
           <a:lstStyle>
-            <a:lvl1pPr indent="-304800" lvl="0" marL="457200">
+            <a:lvl1pPr marL="457200" lvl="0" indent="-304800">
               <a:spcBef>
                 <a:spcPts val="0"/>
               </a:spcBef>
@@ -3180,7 +3267,7 @@
               <a:buChar char="●"/>
               <a:defRPr sz="1200"/>
             </a:lvl1pPr>
-            <a:lvl2pPr indent="-304800" lvl="1" marL="914400">
+            <a:lvl2pPr marL="914400" lvl="1" indent="-304800">
               <a:spcBef>
                 <a:spcPts val="0"/>
               </a:spcBef>
@@ -3191,7 +3278,7 @@
               <a:buChar char="○"/>
               <a:defRPr sz="1200"/>
             </a:lvl2pPr>
-            <a:lvl3pPr indent="-304800" lvl="2" marL="1371600">
+            <a:lvl3pPr marL="1371600" lvl="2" indent="-304800">
               <a:spcBef>
                 <a:spcPts val="0"/>
               </a:spcBef>
@@ -3202,7 +3289,7 @@
               <a:buChar char="■"/>
               <a:defRPr sz="1200"/>
             </a:lvl3pPr>
-            <a:lvl4pPr indent="-304800" lvl="3" marL="1828800">
+            <a:lvl4pPr marL="1828800" lvl="3" indent="-304800">
               <a:spcBef>
                 <a:spcPts val="0"/>
               </a:spcBef>
@@ -3213,7 +3300,7 @@
               <a:buChar char="●"/>
               <a:defRPr sz="1200"/>
             </a:lvl4pPr>
-            <a:lvl5pPr indent="-304800" lvl="4" marL="2286000">
+            <a:lvl5pPr marL="2286000" lvl="4" indent="-304800">
               <a:spcBef>
                 <a:spcPts val="0"/>
               </a:spcBef>
@@ -3224,7 +3311,7 @@
               <a:buChar char="○"/>
               <a:defRPr sz="1200"/>
             </a:lvl5pPr>
-            <a:lvl6pPr indent="-304800" lvl="5" marL="2743200">
+            <a:lvl6pPr marL="2743200" lvl="5" indent="-304800">
               <a:spcBef>
                 <a:spcPts val="0"/>
               </a:spcBef>
@@ -3235,7 +3322,7 @@
               <a:buChar char="■"/>
               <a:defRPr sz="1200"/>
             </a:lvl6pPr>
-            <a:lvl7pPr indent="-304800" lvl="6" marL="3200400">
+            <a:lvl7pPr marL="3200400" lvl="6" indent="-304800">
               <a:spcBef>
                 <a:spcPts val="0"/>
               </a:spcBef>
@@ -3246,7 +3333,7 @@
               <a:buChar char="●"/>
               <a:defRPr sz="1200"/>
             </a:lvl7pPr>
-            <a:lvl8pPr indent="-304800" lvl="7" marL="3657600">
+            <a:lvl8pPr marL="3657600" lvl="7" indent="-304800">
               <a:spcBef>
                 <a:spcPts val="0"/>
               </a:spcBef>
@@ -3257,7 +3344,7 @@
               <a:buChar char="○"/>
               <a:defRPr sz="1200"/>
             </a:lvl8pPr>
-            <a:lvl9pPr indent="-304800" lvl="8" marL="4114800">
+            <a:lvl9pPr marL="4114800" lvl="8" indent="-304800">
               <a:spcBef>
                 <a:spcPts val="0"/>
               </a:spcBef>
@@ -3269,15 +3356,19 @@
               <a:defRPr sz="1200"/>
             </a:lvl9pPr>
           </a:lstStyle>
-          <a:p/>
+          <a:p>
+            <a:endParaRPr/>
+          </a:p>
         </p:txBody>
       </p:sp>
       <p:sp>
         <p:nvSpPr>
           <p:cNvPr id="31" name="Google Shape;31;p7"/>
-          <p:cNvSpPr txBox="1"/>
+          <p:cNvSpPr txBox="1">
+            <a:spLocks noGrp="1"/>
+          </p:cNvSpPr>
           <p:nvPr>
-            <p:ph idx="12" type="sldNum"/>
+            <p:ph type="sldNum" idx="12"/>
           </p:nvPr>
         </p:nvSpPr>
         <p:spPr>
@@ -3290,7 +3381,7 @@
           </a:prstGeom>
         </p:spPr>
         <p:txBody>
-          <a:bodyPr anchorCtr="0" anchor="ctr" bIns="91425" lIns="91425" spcFirstLastPara="1" rIns="91425" wrap="square" tIns="91425">
+          <a:bodyPr spcFirstLastPara="1" wrap="square" lIns="91425" tIns="91425" rIns="91425" bIns="91425" anchor="ctr" anchorCtr="0">
             <a:normAutofit/>
           </a:bodyPr>
           <a:lstStyle>
@@ -3332,7 +3423,7 @@
             </a:lvl9pPr>
           </a:lstStyle>
           <a:p>
-            <a:pPr indent="0" lvl="0" marL="0" rtl="0" algn="r">
+            <a:pPr marL="0" lvl="0" indent="0" algn="r" rtl="0">
               <a:spcBef>
                 <a:spcPts val="0"/>
               </a:spcBef>
@@ -3358,11 +3449,11 @@
 </file>
 
 <file path=ppt/slideLayouts/slideLayout7.xml><?xml version="1.0" encoding="utf-8"?>
-<p:sldLayout xmlns:a="http://schemas.openxmlformats.org/drawingml/2006/main" xmlns:r="http://schemas.openxmlformats.org/officeDocument/2006/relationships" xmlns:mc="http://schemas.openxmlformats.org/markup-compatibility/2006" xmlns:mv="urn:schemas-microsoft-com:mac:vml" xmlns:p="http://schemas.openxmlformats.org/presentationml/2006/main" xmlns:c="http://schemas.openxmlformats.org/drawingml/2006/chart" xmlns:dgm="http://schemas.openxmlformats.org/drawingml/2006/diagram" xmlns:o="urn:schemas-microsoft-com:office:office" xmlns:v="urn:schemas-microsoft-com:vml" xmlns:pvml="urn:schemas-microsoft-com:office:powerpoint" xmlns:com="http://schemas.openxmlformats.org/drawingml/2006/compatibility" xmlns:p14="http://schemas.microsoft.com/office/powerpoint/2010/main" xmlns:p15="http://schemas.microsoft.com/office/powerpoint/2012/main" xmlns:ahyp="http://schemas.microsoft.com/office/drawing/2018/hyperlinkcolor" matchingName="Main point">
+<p:sldLayout xmlns:a="http://schemas.openxmlformats.org/drawingml/2006/main" xmlns:r="http://schemas.openxmlformats.org/officeDocument/2006/relationships" xmlns:p="http://schemas.openxmlformats.org/presentationml/2006/main" matchingName="Main point">
   <p:cSld name="MAIN_POINT">
     <p:spTree>
       <p:nvGrpSpPr>
-        <p:cNvPr id="32" name="Shape 32"/>
+        <p:cNvPr id="1" name="Shape 32"/>
         <p:cNvGrpSpPr/>
         <p:nvPr/>
       </p:nvGrpSpPr>
@@ -3377,7 +3468,9 @@
       <p:sp>
         <p:nvSpPr>
           <p:cNvPr id="33" name="Google Shape;33;p8"/>
-          <p:cNvSpPr txBox="1"/>
+          <p:cNvSpPr txBox="1">
+            <a:spLocks noGrp="1"/>
+          </p:cNvSpPr>
           <p:nvPr>
             <p:ph type="title"/>
           </p:nvPr>
@@ -3392,7 +3485,7 @@
           </a:prstGeom>
         </p:spPr>
         <p:txBody>
-          <a:bodyPr anchorCtr="0" anchor="ctr" bIns="91425" lIns="91425" spcFirstLastPara="1" rIns="91425" wrap="square" tIns="91425">
+          <a:bodyPr spcFirstLastPara="1" wrap="square" lIns="91425" tIns="91425" rIns="91425" bIns="91425" anchor="ctr" anchorCtr="0">
             <a:normAutofit/>
           </a:bodyPr>
           <a:lstStyle>
@@ -3496,15 +3589,19 @@
               <a:defRPr sz="4800"/>
             </a:lvl9pPr>
           </a:lstStyle>
-          <a:p/>
+          <a:p>
+            <a:endParaRPr/>
+          </a:p>
         </p:txBody>
       </p:sp>
       <p:sp>
         <p:nvSpPr>
           <p:cNvPr id="34" name="Google Shape;34;p8"/>
-          <p:cNvSpPr txBox="1"/>
+          <p:cNvSpPr txBox="1">
+            <a:spLocks noGrp="1"/>
+          </p:cNvSpPr>
           <p:nvPr>
-            <p:ph idx="12" type="sldNum"/>
+            <p:ph type="sldNum" idx="12"/>
           </p:nvPr>
         </p:nvSpPr>
         <p:spPr>
@@ -3517,7 +3614,7 @@
           </a:prstGeom>
         </p:spPr>
         <p:txBody>
-          <a:bodyPr anchorCtr="0" anchor="ctr" bIns="91425" lIns="91425" spcFirstLastPara="1" rIns="91425" wrap="square" tIns="91425">
+          <a:bodyPr spcFirstLastPara="1" wrap="square" lIns="91425" tIns="91425" rIns="91425" bIns="91425" anchor="ctr" anchorCtr="0">
             <a:normAutofit/>
           </a:bodyPr>
           <a:lstStyle>
@@ -3559,7 +3656,7 @@
             </a:lvl9pPr>
           </a:lstStyle>
           <a:p>
-            <a:pPr indent="0" lvl="0" marL="0" rtl="0" algn="r">
+            <a:pPr marL="0" lvl="0" indent="0" algn="r" rtl="0">
               <a:spcBef>
                 <a:spcPts val="0"/>
               </a:spcBef>
@@ -3585,11 +3682,11 @@
 </file>
 
 <file path=ppt/slideLayouts/slideLayout8.xml><?xml version="1.0" encoding="utf-8"?>
-<p:sldLayout xmlns:a="http://schemas.openxmlformats.org/drawingml/2006/main" xmlns:r="http://schemas.openxmlformats.org/officeDocument/2006/relationships" xmlns:mc="http://schemas.openxmlformats.org/markup-compatibility/2006" xmlns:mv="urn:schemas-microsoft-com:mac:vml" xmlns:p="http://schemas.openxmlformats.org/presentationml/2006/main" xmlns:c="http://schemas.openxmlformats.org/drawingml/2006/chart" xmlns:dgm="http://schemas.openxmlformats.org/drawingml/2006/diagram" xmlns:o="urn:schemas-microsoft-com:office:office" xmlns:v="urn:schemas-microsoft-com:vml" xmlns:pvml="urn:schemas-microsoft-com:office:powerpoint" xmlns:com="http://schemas.openxmlformats.org/drawingml/2006/compatibility" xmlns:p14="http://schemas.microsoft.com/office/powerpoint/2010/main" xmlns:p15="http://schemas.microsoft.com/office/powerpoint/2012/main" xmlns:ahyp="http://schemas.microsoft.com/office/drawing/2018/hyperlinkcolor" matchingName="Section title and description">
+<p:sldLayout xmlns:a="http://schemas.openxmlformats.org/drawingml/2006/main" xmlns:r="http://schemas.openxmlformats.org/officeDocument/2006/relationships" xmlns:p="http://schemas.openxmlformats.org/presentationml/2006/main" matchingName="Section title and description">
   <p:cSld name="SECTION_TITLE_AND_DESCRIPTION">
     <p:spTree>
       <p:nvGrpSpPr>
-        <p:cNvPr id="35" name="Shape 35"/>
+        <p:cNvPr id="1" name="Shape 35"/>
         <p:cNvGrpSpPr/>
         <p:nvPr/>
       </p:nvGrpSpPr>
@@ -3623,12 +3720,12 @@
           </a:ln>
         </p:spPr>
         <p:txBody>
-          <a:bodyPr anchorCtr="0" anchor="ctr" bIns="91425" lIns="91425" spcFirstLastPara="1" rIns="91425" wrap="square" tIns="91425">
+          <a:bodyPr spcFirstLastPara="1" wrap="square" lIns="91425" tIns="91425" rIns="91425" bIns="91425" anchor="ctr" anchorCtr="0">
             <a:noAutofit/>
           </a:bodyPr>
           <a:lstStyle/>
           <a:p>
-            <a:pPr indent="0" lvl="0" marL="0" rtl="0" algn="l">
+            <a:pPr marL="0" lvl="0" indent="0" algn="l" rtl="0">
               <a:spcBef>
                 <a:spcPts val="0"/>
               </a:spcBef>
@@ -3637,9 +3734,6 @@
               </a:spcAft>
               <a:buNone/>
             </a:pPr>
-            <a:r>
-              <a:t/>
-            </a:r>
             <a:endParaRPr/>
           </a:p>
         </p:txBody>
@@ -3647,7 +3741,9 @@
       <p:sp>
         <p:nvSpPr>
           <p:cNvPr id="37" name="Google Shape;37;p9"/>
-          <p:cNvSpPr txBox="1"/>
+          <p:cNvSpPr txBox="1">
+            <a:spLocks noGrp="1"/>
+          </p:cNvSpPr>
           <p:nvPr>
             <p:ph type="title"/>
           </p:nvPr>
@@ -3662,7 +3758,7 @@
           </a:prstGeom>
         </p:spPr>
         <p:txBody>
-          <a:bodyPr anchorCtr="0" anchor="b" bIns="91425" lIns="91425" spcFirstLastPara="1" rIns="91425" wrap="square" tIns="91425">
+          <a:bodyPr spcFirstLastPara="1" wrap="square" lIns="91425" tIns="91425" rIns="91425" bIns="91425" anchor="b" anchorCtr="0">
             <a:normAutofit/>
           </a:bodyPr>
           <a:lstStyle>
@@ -3766,15 +3862,19 @@
               <a:defRPr sz="4200"/>
             </a:lvl9pPr>
           </a:lstStyle>
-          <a:p/>
+          <a:p>
+            <a:endParaRPr/>
+          </a:p>
         </p:txBody>
       </p:sp>
       <p:sp>
         <p:nvSpPr>
           <p:cNvPr id="38" name="Google Shape;38;p9"/>
-          <p:cNvSpPr txBox="1"/>
+          <p:cNvSpPr txBox="1">
+            <a:spLocks noGrp="1"/>
+          </p:cNvSpPr>
           <p:nvPr>
-            <p:ph idx="1" type="subTitle"/>
+            <p:ph type="subTitle" idx="1"/>
           </p:nvPr>
         </p:nvSpPr>
         <p:spPr>
@@ -3787,7 +3887,7 @@
           </a:prstGeom>
         </p:spPr>
         <p:txBody>
-          <a:bodyPr anchorCtr="0" anchor="t" bIns="91425" lIns="91425" spcFirstLastPara="1" rIns="91425" wrap="square" tIns="91425">
+          <a:bodyPr spcFirstLastPara="1" wrap="square" lIns="91425" tIns="91425" rIns="91425" bIns="91425" anchor="t" anchorCtr="0">
             <a:normAutofit/>
           </a:bodyPr>
           <a:lstStyle>
@@ -3918,15 +4018,19 @@
               <a:defRPr sz="2100"/>
             </a:lvl9pPr>
           </a:lstStyle>
-          <a:p/>
+          <a:p>
+            <a:endParaRPr/>
+          </a:p>
         </p:txBody>
       </p:sp>
       <p:sp>
         <p:nvSpPr>
           <p:cNvPr id="39" name="Google Shape;39;p9"/>
-          <p:cNvSpPr txBox="1"/>
+          <p:cNvSpPr txBox="1">
+            <a:spLocks noGrp="1"/>
+          </p:cNvSpPr>
           <p:nvPr>
-            <p:ph idx="2" type="body"/>
+            <p:ph type="body" idx="2"/>
           </p:nvPr>
         </p:nvSpPr>
         <p:spPr>
@@ -3939,11 +4043,11 @@
           </a:prstGeom>
         </p:spPr>
         <p:txBody>
-          <a:bodyPr anchorCtr="0" anchor="ctr" bIns="91425" lIns="91425" spcFirstLastPara="1" rIns="91425" wrap="square" tIns="91425">
+          <a:bodyPr spcFirstLastPara="1" wrap="square" lIns="91425" tIns="91425" rIns="91425" bIns="91425" anchor="ctr" anchorCtr="0">
             <a:normAutofit/>
           </a:bodyPr>
           <a:lstStyle>
-            <a:lvl1pPr indent="-342900" lvl="0" marL="457200">
+            <a:lvl1pPr marL="457200" lvl="0" indent="-342900">
               <a:spcBef>
                 <a:spcPts val="0"/>
               </a:spcBef>
@@ -3954,7 +4058,7 @@
               <a:buChar char="●"/>
               <a:defRPr/>
             </a:lvl1pPr>
-            <a:lvl2pPr indent="-317500" lvl="1" marL="914400">
+            <a:lvl2pPr marL="914400" lvl="1" indent="-317500">
               <a:spcBef>
                 <a:spcPts val="0"/>
               </a:spcBef>
@@ -3965,7 +4069,7 @@
               <a:buChar char="○"/>
               <a:defRPr/>
             </a:lvl2pPr>
-            <a:lvl3pPr indent="-317500" lvl="2" marL="1371600">
+            <a:lvl3pPr marL="1371600" lvl="2" indent="-317500">
               <a:spcBef>
                 <a:spcPts val="0"/>
               </a:spcBef>
@@ -3976,7 +4080,7 @@
               <a:buChar char="■"/>
               <a:defRPr/>
             </a:lvl3pPr>
-            <a:lvl4pPr indent="-317500" lvl="3" marL="1828800">
+            <a:lvl4pPr marL="1828800" lvl="3" indent="-317500">
               <a:spcBef>
                 <a:spcPts val="0"/>
               </a:spcBef>
@@ -3987,7 +4091,7 @@
               <a:buChar char="●"/>
               <a:defRPr/>
             </a:lvl4pPr>
-            <a:lvl5pPr indent="-317500" lvl="4" marL="2286000">
+            <a:lvl5pPr marL="2286000" lvl="4" indent="-317500">
               <a:spcBef>
                 <a:spcPts val="0"/>
               </a:spcBef>
@@ -3998,7 +4102,7 @@
               <a:buChar char="○"/>
               <a:defRPr/>
             </a:lvl5pPr>
-            <a:lvl6pPr indent="-317500" lvl="5" marL="2743200">
+            <a:lvl6pPr marL="2743200" lvl="5" indent="-317500">
               <a:spcBef>
                 <a:spcPts val="0"/>
               </a:spcBef>
@@ -4009,7 +4113,7 @@
               <a:buChar char="■"/>
               <a:defRPr/>
             </a:lvl6pPr>
-            <a:lvl7pPr indent="-317500" lvl="6" marL="3200400">
+            <a:lvl7pPr marL="3200400" lvl="6" indent="-317500">
               <a:spcBef>
                 <a:spcPts val="0"/>
               </a:spcBef>
@@ -4020,7 +4124,7 @@
               <a:buChar char="●"/>
               <a:defRPr/>
             </a:lvl7pPr>
-            <a:lvl8pPr indent="-317500" lvl="7" marL="3657600">
+            <a:lvl8pPr marL="3657600" lvl="7" indent="-317500">
               <a:spcBef>
                 <a:spcPts val="0"/>
               </a:spcBef>
@@ -4031,7 +4135,7 @@
               <a:buChar char="○"/>
               <a:defRPr/>
             </a:lvl8pPr>
-            <a:lvl9pPr indent="-317500" lvl="8" marL="4114800">
+            <a:lvl9pPr marL="4114800" lvl="8" indent="-317500">
               <a:spcBef>
                 <a:spcPts val="0"/>
               </a:spcBef>
@@ -4043,15 +4147,19 @@
               <a:defRPr/>
             </a:lvl9pPr>
           </a:lstStyle>
-          <a:p/>
+          <a:p>
+            <a:endParaRPr/>
+          </a:p>
         </p:txBody>
       </p:sp>
       <p:sp>
         <p:nvSpPr>
           <p:cNvPr id="40" name="Google Shape;40;p9"/>
-          <p:cNvSpPr txBox="1"/>
+          <p:cNvSpPr txBox="1">
+            <a:spLocks noGrp="1"/>
+          </p:cNvSpPr>
           <p:nvPr>
-            <p:ph idx="12" type="sldNum"/>
+            <p:ph type="sldNum" idx="12"/>
           </p:nvPr>
         </p:nvSpPr>
         <p:spPr>
@@ -4064,7 +4172,7 @@
           </a:prstGeom>
         </p:spPr>
         <p:txBody>
-          <a:bodyPr anchorCtr="0" anchor="ctr" bIns="91425" lIns="91425" spcFirstLastPara="1" rIns="91425" wrap="square" tIns="91425">
+          <a:bodyPr spcFirstLastPara="1" wrap="square" lIns="91425" tIns="91425" rIns="91425" bIns="91425" anchor="ctr" anchorCtr="0">
             <a:normAutofit/>
           </a:bodyPr>
           <a:lstStyle>
@@ -4106,7 +4214,7 @@
             </a:lvl9pPr>
           </a:lstStyle>
           <a:p>
-            <a:pPr indent="0" lvl="0" marL="0" rtl="0" algn="r">
+            <a:pPr marL="0" lvl="0" indent="0" algn="r" rtl="0">
               <a:spcBef>
                 <a:spcPts val="0"/>
               </a:spcBef>
@@ -4132,11 +4240,11 @@
 </file>
 
 <file path=ppt/slideLayouts/slideLayout9.xml><?xml version="1.0" encoding="utf-8"?>
-<p:sldLayout xmlns:a="http://schemas.openxmlformats.org/drawingml/2006/main" xmlns:r="http://schemas.openxmlformats.org/officeDocument/2006/relationships" xmlns:mc="http://schemas.openxmlformats.org/markup-compatibility/2006" xmlns:mv="urn:schemas-microsoft-com:mac:vml" xmlns:p="http://schemas.openxmlformats.org/presentationml/2006/main" xmlns:c="http://schemas.openxmlformats.org/drawingml/2006/chart" xmlns:dgm="http://schemas.openxmlformats.org/drawingml/2006/diagram" xmlns:o="urn:schemas-microsoft-com:office:office" xmlns:v="urn:schemas-microsoft-com:vml" xmlns:pvml="urn:schemas-microsoft-com:office:powerpoint" xmlns:com="http://schemas.openxmlformats.org/drawingml/2006/compatibility" xmlns:p14="http://schemas.microsoft.com/office/powerpoint/2010/main" xmlns:p15="http://schemas.microsoft.com/office/powerpoint/2012/main" xmlns:ahyp="http://schemas.microsoft.com/office/drawing/2018/hyperlinkcolor" matchingName="Caption">
+<p:sldLayout xmlns:a="http://schemas.openxmlformats.org/drawingml/2006/main" xmlns:r="http://schemas.openxmlformats.org/officeDocument/2006/relationships" xmlns:p="http://schemas.openxmlformats.org/presentationml/2006/main" matchingName="Caption">
   <p:cSld name="CAPTION_ONLY">
     <p:spTree>
       <p:nvGrpSpPr>
-        <p:cNvPr id="41" name="Shape 41"/>
+        <p:cNvPr id="1" name="Shape 41"/>
         <p:cNvGrpSpPr/>
         <p:nvPr/>
       </p:nvGrpSpPr>
@@ -4151,9 +4259,11 @@
       <p:sp>
         <p:nvSpPr>
           <p:cNvPr id="42" name="Google Shape;42;p10"/>
-          <p:cNvSpPr txBox="1"/>
+          <p:cNvSpPr txBox="1">
+            <a:spLocks noGrp="1"/>
+          </p:cNvSpPr>
           <p:nvPr>
-            <p:ph idx="1" type="body"/>
+            <p:ph type="body" idx="1"/>
           </p:nvPr>
         </p:nvSpPr>
         <p:spPr>
@@ -4166,11 +4276,11 @@
           </a:prstGeom>
         </p:spPr>
         <p:txBody>
-          <a:bodyPr anchorCtr="0" anchor="ctr" bIns="91425" lIns="91425" spcFirstLastPara="1" rIns="91425" wrap="square" tIns="91425">
+          <a:bodyPr spcFirstLastPara="1" wrap="square" lIns="91425" tIns="91425" rIns="91425" bIns="91425" anchor="ctr" anchorCtr="0">
             <a:normAutofit/>
           </a:bodyPr>
           <a:lstStyle>
-            <a:lvl1pPr indent="-228600" lvl="0" marL="457200">
+            <a:lvl1pPr marL="457200" lvl="0" indent="-228600">
               <a:lnSpc>
                 <a:spcPct val="100000"/>
               </a:lnSpc>
@@ -4185,15 +4295,19 @@
               <a:defRPr/>
             </a:lvl1pPr>
           </a:lstStyle>
-          <a:p/>
+          <a:p>
+            <a:endParaRPr/>
+          </a:p>
         </p:txBody>
       </p:sp>
       <p:sp>
         <p:nvSpPr>
           <p:cNvPr id="43" name="Google Shape;43;p10"/>
-          <p:cNvSpPr txBox="1"/>
+          <p:cNvSpPr txBox="1">
+            <a:spLocks noGrp="1"/>
+          </p:cNvSpPr>
           <p:nvPr>
-            <p:ph idx="12" type="sldNum"/>
+            <p:ph type="sldNum" idx="12"/>
           </p:nvPr>
         </p:nvSpPr>
         <p:spPr>
@@ -4206,7 +4320,7 @@
           </a:prstGeom>
         </p:spPr>
         <p:txBody>
-          <a:bodyPr anchorCtr="0" anchor="ctr" bIns="91425" lIns="91425" spcFirstLastPara="1" rIns="91425" wrap="square" tIns="91425">
+          <a:bodyPr spcFirstLastPara="1" wrap="square" lIns="91425" tIns="91425" rIns="91425" bIns="91425" anchor="ctr" anchorCtr="0">
             <a:normAutofit/>
           </a:bodyPr>
           <a:lstStyle>
@@ -4248,7 +4362,7 @@
             </a:lvl9pPr>
           </a:lstStyle>
           <a:p>
-            <a:pPr indent="0" lvl="0" marL="0" rtl="0" algn="r">
+            <a:pPr marL="0" lvl="0" indent="0" algn="r" rtl="0">
               <a:spcBef>
                 <a:spcPts val="0"/>
               </a:spcBef>
@@ -4274,18 +4388,19 @@
 </file>
 
 <file path=ppt/slideMasters/slideMaster1.xml><?xml version="1.0" encoding="utf-8"?>
-<p:sldMaster xmlns:a="http://schemas.openxmlformats.org/drawingml/2006/main" xmlns:r="http://schemas.openxmlformats.org/officeDocument/2006/relationships" xmlns:mc="http://schemas.openxmlformats.org/markup-compatibility/2006" xmlns:mv="urn:schemas-microsoft-com:mac:vml" xmlns:p="http://schemas.openxmlformats.org/presentationml/2006/main" xmlns:c="http://schemas.openxmlformats.org/drawingml/2006/chart" xmlns:dgm="http://schemas.openxmlformats.org/drawingml/2006/diagram" xmlns:o="urn:schemas-microsoft-com:office:office" xmlns:v="urn:schemas-microsoft-com:vml" xmlns:pvml="urn:schemas-microsoft-com:office:powerpoint" xmlns:com="http://schemas.openxmlformats.org/drawingml/2006/compatibility" xmlns:p14="http://schemas.microsoft.com/office/powerpoint/2010/main" xmlns:p15="http://schemas.microsoft.com/office/powerpoint/2012/main" xmlns:ahyp="http://schemas.microsoft.com/office/drawing/2018/hyperlinkcolor">
+<p:sldMaster xmlns:a="http://schemas.openxmlformats.org/drawingml/2006/main" xmlns:r="http://schemas.openxmlformats.org/officeDocument/2006/relationships" xmlns:p="http://schemas.openxmlformats.org/presentationml/2006/main">
   <p:cSld name="simple-light-2">
     <p:bg>
       <p:bgPr>
         <a:solidFill>
           <a:schemeClr val="lt1"/>
         </a:solidFill>
+        <a:effectLst/>
       </p:bgPr>
     </p:bg>
     <p:spTree>
       <p:nvGrpSpPr>
-        <p:cNvPr id="5" name="Shape 5"/>
+        <p:cNvPr id="1" name="Shape 5"/>
         <p:cNvGrpSpPr/>
         <p:nvPr/>
       </p:nvGrpSpPr>
@@ -4300,7 +4415,9 @@
       <p:sp>
         <p:nvSpPr>
           <p:cNvPr id="6" name="Google Shape;6;p1"/>
-          <p:cNvSpPr txBox="1"/>
+          <p:cNvSpPr txBox="1">
+            <a:spLocks noGrp="1"/>
+          </p:cNvSpPr>
           <p:nvPr>
             <p:ph type="title"/>
           </p:nvPr>
@@ -4319,7 +4436,7 @@
           </a:ln>
         </p:spPr>
         <p:txBody>
-          <a:bodyPr anchorCtr="0" anchor="t" bIns="91425" lIns="91425" spcFirstLastPara="1" rIns="91425" wrap="square" tIns="91425">
+          <a:bodyPr spcFirstLastPara="1" wrap="square" lIns="91425" tIns="91425" rIns="91425" bIns="91425" anchor="t" anchorCtr="0">
             <a:normAutofit/>
           </a:bodyPr>
           <a:lstStyle>
@@ -4486,15 +4603,19 @@
               </a:defRPr>
             </a:lvl9pPr>
           </a:lstStyle>
-          <a:p/>
+          <a:p>
+            <a:endParaRPr/>
+          </a:p>
         </p:txBody>
       </p:sp>
       <p:sp>
         <p:nvSpPr>
           <p:cNvPr id="7" name="Google Shape;7;p1"/>
-          <p:cNvSpPr txBox="1"/>
+          <p:cNvSpPr txBox="1">
+            <a:spLocks noGrp="1"/>
+          </p:cNvSpPr>
           <p:nvPr>
-            <p:ph idx="1" type="body"/>
+            <p:ph type="body" idx="1"/>
           </p:nvPr>
         </p:nvSpPr>
         <p:spPr>
@@ -4511,11 +4632,11 @@
           </a:ln>
         </p:spPr>
         <p:txBody>
-          <a:bodyPr anchorCtr="0" anchor="t" bIns="91425" lIns="91425" spcFirstLastPara="1" rIns="91425" wrap="square" tIns="91425">
+          <a:bodyPr spcFirstLastPara="1" wrap="square" lIns="91425" tIns="91425" rIns="91425" bIns="91425" anchor="t" anchorCtr="0">
             <a:normAutofit/>
           </a:bodyPr>
           <a:lstStyle>
-            <a:lvl1pPr indent="-342900" lvl="0" marL="457200">
+            <a:lvl1pPr marL="457200" lvl="0" indent="-342900">
               <a:lnSpc>
                 <a:spcPct val="115000"/>
               </a:lnSpc>
@@ -4536,7 +4657,7 @@
                 </a:solidFill>
               </a:defRPr>
             </a:lvl1pPr>
-            <a:lvl2pPr indent="-317500" lvl="1" marL="914400">
+            <a:lvl2pPr marL="914400" lvl="1" indent="-317500">
               <a:lnSpc>
                 <a:spcPct val="115000"/>
               </a:lnSpc>
@@ -4557,7 +4678,7 @@
                 </a:solidFill>
               </a:defRPr>
             </a:lvl2pPr>
-            <a:lvl3pPr indent="-317500" lvl="2" marL="1371600">
+            <a:lvl3pPr marL="1371600" lvl="2" indent="-317500">
               <a:lnSpc>
                 <a:spcPct val="115000"/>
               </a:lnSpc>
@@ -4578,7 +4699,7 @@
                 </a:solidFill>
               </a:defRPr>
             </a:lvl3pPr>
-            <a:lvl4pPr indent="-317500" lvl="3" marL="1828800">
+            <a:lvl4pPr marL="1828800" lvl="3" indent="-317500">
               <a:lnSpc>
                 <a:spcPct val="115000"/>
               </a:lnSpc>
@@ -4599,7 +4720,7 @@
                 </a:solidFill>
               </a:defRPr>
             </a:lvl4pPr>
-            <a:lvl5pPr indent="-317500" lvl="4" marL="2286000">
+            <a:lvl5pPr marL="2286000" lvl="4" indent="-317500">
               <a:lnSpc>
                 <a:spcPct val="115000"/>
               </a:lnSpc>
@@ -4620,7 +4741,7 @@
                 </a:solidFill>
               </a:defRPr>
             </a:lvl5pPr>
-            <a:lvl6pPr indent="-317500" lvl="5" marL="2743200">
+            <a:lvl6pPr marL="2743200" lvl="5" indent="-317500">
               <a:lnSpc>
                 <a:spcPct val="115000"/>
               </a:lnSpc>
@@ -4641,7 +4762,7 @@
                 </a:solidFill>
               </a:defRPr>
             </a:lvl6pPr>
-            <a:lvl7pPr indent="-317500" lvl="6" marL="3200400">
+            <a:lvl7pPr marL="3200400" lvl="6" indent="-317500">
               <a:lnSpc>
                 <a:spcPct val="115000"/>
               </a:lnSpc>
@@ -4662,7 +4783,7 @@
                 </a:solidFill>
               </a:defRPr>
             </a:lvl7pPr>
-            <a:lvl8pPr indent="-317500" lvl="7" marL="3657600">
+            <a:lvl8pPr marL="3657600" lvl="7" indent="-317500">
               <a:lnSpc>
                 <a:spcPct val="115000"/>
               </a:lnSpc>
@@ -4683,7 +4804,7 @@
                 </a:solidFill>
               </a:defRPr>
             </a:lvl8pPr>
-            <a:lvl9pPr indent="-317500" lvl="8" marL="4114800">
+            <a:lvl9pPr marL="4114800" lvl="8" indent="-317500">
               <a:lnSpc>
                 <a:spcPct val="115000"/>
               </a:lnSpc>
@@ -4705,15 +4826,19 @@
               </a:defRPr>
             </a:lvl9pPr>
           </a:lstStyle>
-          <a:p/>
+          <a:p>
+            <a:endParaRPr/>
+          </a:p>
         </p:txBody>
       </p:sp>
       <p:sp>
         <p:nvSpPr>
           <p:cNvPr id="8" name="Google Shape;8;p1"/>
-          <p:cNvSpPr txBox="1"/>
+          <p:cNvSpPr txBox="1">
+            <a:spLocks noGrp="1"/>
+          </p:cNvSpPr>
           <p:nvPr>
-            <p:ph idx="12" type="sldNum"/>
+            <p:ph type="sldNum" idx="12"/>
           </p:nvPr>
         </p:nvSpPr>
         <p:spPr>
@@ -4730,7 +4855,7 @@
           </a:ln>
         </p:spPr>
         <p:txBody>
-          <a:bodyPr anchorCtr="0" anchor="ctr" bIns="91425" lIns="91425" spcFirstLastPara="1" rIns="91425" wrap="square" tIns="91425">
+          <a:bodyPr spcFirstLastPara="1" wrap="square" lIns="91425" tIns="91425" rIns="91425" bIns="91425" anchor="ctr" anchorCtr="0">
             <a:normAutofit/>
           </a:bodyPr>
           <a:lstStyle>
@@ -4808,7 +4933,7 @@
             </a:lvl9pPr>
           </a:lstStyle>
           <a:p>
-            <a:pPr indent="0" lvl="0" marL="0" rtl="0" algn="r">
+            <a:pPr marL="0" lvl="0" indent="0" algn="r" rtl="0">
               <a:spcBef>
                 <a:spcPts val="0"/>
               </a:spcBef>
@@ -4827,7 +4952,7 @@
       </p:sp>
     </p:spTree>
   </p:cSld>
-  <p:clrMap accent1="accent1" accent2="accent2" accent3="accent3" accent4="accent4" accent5="accent5" accent6="accent6" bg1="lt1" bg2="dk2" tx1="dk1" tx2="lt2" folHlink="folHlink" hlink="hlink"/>
+  <p:clrMap bg1="lt1" tx1="dk1" bg2="dk2" tx2="lt2" accent1="accent1" accent2="accent2" accent3="accent3" accent4="accent4" accent5="accent5" accent6="accent6" hlink="hlink" folHlink="folHlink"/>
   <p:sldLayoutIdLst>
     <p:sldLayoutId id="2147483648" r:id="rId1"/>
     <p:sldLayoutId id="2147483649" r:id="rId2"/>
@@ -4841,10 +4966,10 @@
     <p:sldLayoutId id="2147483657" r:id="rId10"/>
     <p:sldLayoutId id="2147483658" r:id="rId11"/>
   </p:sldLayoutIdLst>
-  <p:hf dt="0" ftr="0" hdr="0" sldNum="0"/>
+  <p:hf sldNum="0" hdr="0" ftr="0" dt="0"/>
   <p:txStyles>
     <p:titleStyle>
-      <a:defPPr lvl="0" marR="0" rtl="0" algn="l">
+      <a:defPPr marR="0" lvl="0" algn="l" rtl="0">
         <a:lnSpc>
           <a:spcPct val="100000"/>
         </a:lnSpc>
@@ -4855,7 +4980,7 @@
           <a:spcPts val="0"/>
         </a:spcAft>
       </a:defPPr>
-      <a:lvl1pPr lvl="0" marR="0" rtl="0" algn="l">
+      <a:lvl1pPr marR="0" lvl="0" algn="l" rtl="0">
         <a:lnSpc>
           <a:spcPct val="100000"/>
         </a:lnSpc>
@@ -4869,7 +4994,7 @@
           <a:srgbClr val="000000"/>
         </a:buClr>
         <a:buFont typeface="Arial"/>
-        <a:defRPr b="0" i="0" sz="1400" u="none" cap="none" strike="noStrike">
+        <a:defRPr sz="1400" b="0" i="0" u="none" strike="noStrike" cap="none">
           <a:solidFill>
             <a:srgbClr val="000000"/>
           </a:solidFill>
@@ -4879,7 +5004,7 @@
           <a:sym typeface="Arial"/>
         </a:defRPr>
       </a:lvl1pPr>
-      <a:lvl2pPr lvl="1" marR="0" rtl="0" algn="l">
+      <a:lvl2pPr marR="0" lvl="1" algn="l" rtl="0">
         <a:lnSpc>
           <a:spcPct val="100000"/>
         </a:lnSpc>
@@ -4893,7 +5018,7 @@
           <a:srgbClr val="000000"/>
         </a:buClr>
         <a:buFont typeface="Arial"/>
-        <a:defRPr b="0" i="0" sz="1400" u="none" cap="none" strike="noStrike">
+        <a:defRPr sz="1400" b="0" i="0" u="none" strike="noStrike" cap="none">
           <a:solidFill>
             <a:srgbClr val="000000"/>
           </a:solidFill>
@@ -4903,7 +5028,7 @@
           <a:sym typeface="Arial"/>
         </a:defRPr>
       </a:lvl2pPr>
-      <a:lvl3pPr lvl="2" marR="0" rtl="0" algn="l">
+      <a:lvl3pPr marR="0" lvl="2" algn="l" rtl="0">
         <a:lnSpc>
           <a:spcPct val="100000"/>
         </a:lnSpc>
@@ -4917,7 +5042,7 @@
           <a:srgbClr val="000000"/>
         </a:buClr>
         <a:buFont typeface="Arial"/>
-        <a:defRPr b="0" i="0" sz="1400" u="none" cap="none" strike="noStrike">
+        <a:defRPr sz="1400" b="0" i="0" u="none" strike="noStrike" cap="none">
           <a:solidFill>
             <a:srgbClr val="000000"/>
           </a:solidFill>
@@ -4927,7 +5052,7 @@
           <a:sym typeface="Arial"/>
         </a:defRPr>
       </a:lvl3pPr>
-      <a:lvl4pPr lvl="3" marR="0" rtl="0" algn="l">
+      <a:lvl4pPr marR="0" lvl="3" algn="l" rtl="0">
         <a:lnSpc>
           <a:spcPct val="100000"/>
         </a:lnSpc>
@@ -4941,7 +5066,7 @@
           <a:srgbClr val="000000"/>
         </a:buClr>
         <a:buFont typeface="Arial"/>
-        <a:defRPr b="0" i="0" sz="1400" u="none" cap="none" strike="noStrike">
+        <a:defRPr sz="1400" b="0" i="0" u="none" strike="noStrike" cap="none">
           <a:solidFill>
             <a:srgbClr val="000000"/>
           </a:solidFill>
@@ -4951,7 +5076,7 @@
           <a:sym typeface="Arial"/>
         </a:defRPr>
       </a:lvl4pPr>
-      <a:lvl5pPr lvl="4" marR="0" rtl="0" algn="l">
+      <a:lvl5pPr marR="0" lvl="4" algn="l" rtl="0">
         <a:lnSpc>
           <a:spcPct val="100000"/>
         </a:lnSpc>
@@ -4965,7 +5090,7 @@
           <a:srgbClr val="000000"/>
         </a:buClr>
         <a:buFont typeface="Arial"/>
-        <a:defRPr b="0" i="0" sz="1400" u="none" cap="none" strike="noStrike">
+        <a:defRPr sz="1400" b="0" i="0" u="none" strike="noStrike" cap="none">
           <a:solidFill>
             <a:srgbClr val="000000"/>
           </a:solidFill>
@@ -4975,7 +5100,7 @@
           <a:sym typeface="Arial"/>
         </a:defRPr>
       </a:lvl5pPr>
-      <a:lvl6pPr lvl="5" marR="0" rtl="0" algn="l">
+      <a:lvl6pPr marR="0" lvl="5" algn="l" rtl="0">
         <a:lnSpc>
           <a:spcPct val="100000"/>
         </a:lnSpc>
@@ -4989,7 +5114,7 @@
           <a:srgbClr val="000000"/>
         </a:buClr>
         <a:buFont typeface="Arial"/>
-        <a:defRPr b="0" i="0" sz="1400" u="none" cap="none" strike="noStrike">
+        <a:defRPr sz="1400" b="0" i="0" u="none" strike="noStrike" cap="none">
           <a:solidFill>
             <a:srgbClr val="000000"/>
           </a:solidFill>
@@ -4999,7 +5124,7 @@
           <a:sym typeface="Arial"/>
         </a:defRPr>
       </a:lvl6pPr>
-      <a:lvl7pPr lvl="6" marR="0" rtl="0" algn="l">
+      <a:lvl7pPr marR="0" lvl="6" algn="l" rtl="0">
         <a:lnSpc>
           <a:spcPct val="100000"/>
         </a:lnSpc>
@@ -5013,7 +5138,7 @@
           <a:srgbClr val="000000"/>
         </a:buClr>
         <a:buFont typeface="Arial"/>
-        <a:defRPr b="0" i="0" sz="1400" u="none" cap="none" strike="noStrike">
+        <a:defRPr sz="1400" b="0" i="0" u="none" strike="noStrike" cap="none">
           <a:solidFill>
             <a:srgbClr val="000000"/>
           </a:solidFill>
@@ -5023,7 +5148,7 @@
           <a:sym typeface="Arial"/>
         </a:defRPr>
       </a:lvl7pPr>
-      <a:lvl8pPr lvl="7" marR="0" rtl="0" algn="l">
+      <a:lvl8pPr marR="0" lvl="7" algn="l" rtl="0">
         <a:lnSpc>
           <a:spcPct val="100000"/>
         </a:lnSpc>
@@ -5037,7 +5162,7 @@
           <a:srgbClr val="000000"/>
         </a:buClr>
         <a:buFont typeface="Arial"/>
-        <a:defRPr b="0" i="0" sz="1400" u="none" cap="none" strike="noStrike">
+        <a:defRPr sz="1400" b="0" i="0" u="none" strike="noStrike" cap="none">
           <a:solidFill>
             <a:srgbClr val="000000"/>
           </a:solidFill>
@@ -5047,7 +5172,7 @@
           <a:sym typeface="Arial"/>
         </a:defRPr>
       </a:lvl8pPr>
-      <a:lvl9pPr lvl="8" marR="0" rtl="0" algn="l">
+      <a:lvl9pPr marR="0" lvl="8" algn="l" rtl="0">
         <a:lnSpc>
           <a:spcPct val="100000"/>
         </a:lnSpc>
@@ -5061,7 +5186,7 @@
           <a:srgbClr val="000000"/>
         </a:buClr>
         <a:buFont typeface="Arial"/>
-        <a:defRPr b="0" i="0" sz="1400" u="none" cap="none" strike="noStrike">
+        <a:defRPr sz="1400" b="0" i="0" u="none" strike="noStrike" cap="none">
           <a:solidFill>
             <a:srgbClr val="000000"/>
           </a:solidFill>
@@ -5073,7 +5198,7 @@
       </a:lvl9pPr>
     </p:titleStyle>
     <p:bodyStyle>
-      <a:defPPr lvl="0" marR="0" rtl="0" algn="l">
+      <a:defPPr marR="0" lvl="0" algn="l" rtl="0">
         <a:lnSpc>
           <a:spcPct val="100000"/>
         </a:lnSpc>
@@ -5084,7 +5209,7 @@
           <a:spcPts val="0"/>
         </a:spcAft>
       </a:defPPr>
-      <a:lvl1pPr lvl="0" marR="0" rtl="0" algn="l">
+      <a:lvl1pPr marR="0" lvl="0" algn="l" rtl="0">
         <a:lnSpc>
           <a:spcPct val="100000"/>
         </a:lnSpc>
@@ -5098,7 +5223,7 @@
           <a:srgbClr val="000000"/>
         </a:buClr>
         <a:buFont typeface="Arial"/>
-        <a:defRPr b="0" i="0" sz="1400" u="none" cap="none" strike="noStrike">
+        <a:defRPr sz="1400" b="0" i="0" u="none" strike="noStrike" cap="none">
           <a:solidFill>
             <a:srgbClr val="000000"/>
           </a:solidFill>
@@ -5108,7 +5233,7 @@
           <a:sym typeface="Arial"/>
         </a:defRPr>
       </a:lvl1pPr>
-      <a:lvl2pPr lvl="1" marR="0" rtl="0" algn="l">
+      <a:lvl2pPr marR="0" lvl="1" algn="l" rtl="0">
         <a:lnSpc>
           <a:spcPct val="100000"/>
         </a:lnSpc>
@@ -5122,7 +5247,7 @@
           <a:srgbClr val="000000"/>
         </a:buClr>
         <a:buFont typeface="Arial"/>
-        <a:defRPr b="0" i="0" sz="1400" u="none" cap="none" strike="noStrike">
+        <a:defRPr sz="1400" b="0" i="0" u="none" strike="noStrike" cap="none">
           <a:solidFill>
             <a:srgbClr val="000000"/>
           </a:solidFill>
@@ -5132,7 +5257,7 @@
           <a:sym typeface="Arial"/>
         </a:defRPr>
       </a:lvl2pPr>
-      <a:lvl3pPr lvl="2" marR="0" rtl="0" algn="l">
+      <a:lvl3pPr marR="0" lvl="2" algn="l" rtl="0">
         <a:lnSpc>
           <a:spcPct val="100000"/>
         </a:lnSpc>
@@ -5146,7 +5271,7 @@
           <a:srgbClr val="000000"/>
         </a:buClr>
         <a:buFont typeface="Arial"/>
-        <a:defRPr b="0" i="0" sz="1400" u="none" cap="none" strike="noStrike">
+        <a:defRPr sz="1400" b="0" i="0" u="none" strike="noStrike" cap="none">
           <a:solidFill>
             <a:srgbClr val="000000"/>
           </a:solidFill>
@@ -5156,7 +5281,7 @@
           <a:sym typeface="Arial"/>
         </a:defRPr>
       </a:lvl3pPr>
-      <a:lvl4pPr lvl="3" marR="0" rtl="0" algn="l">
+      <a:lvl4pPr marR="0" lvl="3" algn="l" rtl="0">
         <a:lnSpc>
           <a:spcPct val="100000"/>
         </a:lnSpc>
@@ -5170,7 +5295,7 @@
           <a:srgbClr val="000000"/>
         </a:buClr>
         <a:buFont typeface="Arial"/>
-        <a:defRPr b="0" i="0" sz="1400" u="none" cap="none" strike="noStrike">
+        <a:defRPr sz="1400" b="0" i="0" u="none" strike="noStrike" cap="none">
           <a:solidFill>
             <a:srgbClr val="000000"/>
           </a:solidFill>
@@ -5180,7 +5305,7 @@
           <a:sym typeface="Arial"/>
         </a:defRPr>
       </a:lvl4pPr>
-      <a:lvl5pPr lvl="4" marR="0" rtl="0" algn="l">
+      <a:lvl5pPr marR="0" lvl="4" algn="l" rtl="0">
         <a:lnSpc>
           <a:spcPct val="100000"/>
         </a:lnSpc>
@@ -5194,7 +5319,7 @@
           <a:srgbClr val="000000"/>
         </a:buClr>
         <a:buFont typeface="Arial"/>
-        <a:defRPr b="0" i="0" sz="1400" u="none" cap="none" strike="noStrike">
+        <a:defRPr sz="1400" b="0" i="0" u="none" strike="noStrike" cap="none">
           <a:solidFill>
             <a:srgbClr val="000000"/>
           </a:solidFill>
@@ -5204,7 +5329,7 @@
           <a:sym typeface="Arial"/>
         </a:defRPr>
       </a:lvl5pPr>
-      <a:lvl6pPr lvl="5" marR="0" rtl="0" algn="l">
+      <a:lvl6pPr marR="0" lvl="5" algn="l" rtl="0">
         <a:lnSpc>
           <a:spcPct val="100000"/>
         </a:lnSpc>
@@ -5218,7 +5343,7 @@
           <a:srgbClr val="000000"/>
         </a:buClr>
         <a:buFont typeface="Arial"/>
-        <a:defRPr b="0" i="0" sz="1400" u="none" cap="none" strike="noStrike">
+        <a:defRPr sz="1400" b="0" i="0" u="none" strike="noStrike" cap="none">
           <a:solidFill>
             <a:srgbClr val="000000"/>
           </a:solidFill>
@@ -5228,7 +5353,7 @@
           <a:sym typeface="Arial"/>
         </a:defRPr>
       </a:lvl6pPr>
-      <a:lvl7pPr lvl="6" marR="0" rtl="0" algn="l">
+      <a:lvl7pPr marR="0" lvl="6" algn="l" rtl="0">
         <a:lnSpc>
           <a:spcPct val="100000"/>
         </a:lnSpc>
@@ -5242,7 +5367,7 @@
           <a:srgbClr val="000000"/>
         </a:buClr>
         <a:buFont typeface="Arial"/>
-        <a:defRPr b="0" i="0" sz="1400" u="none" cap="none" strike="noStrike">
+        <a:defRPr sz="1400" b="0" i="0" u="none" strike="noStrike" cap="none">
           <a:solidFill>
             <a:srgbClr val="000000"/>
           </a:solidFill>
@@ -5252,7 +5377,7 @@
           <a:sym typeface="Arial"/>
         </a:defRPr>
       </a:lvl7pPr>
-      <a:lvl8pPr lvl="7" marR="0" rtl="0" algn="l">
+      <a:lvl8pPr marR="0" lvl="7" algn="l" rtl="0">
         <a:lnSpc>
           <a:spcPct val="100000"/>
         </a:lnSpc>
@@ -5266,7 +5391,7 @@
           <a:srgbClr val="000000"/>
         </a:buClr>
         <a:buFont typeface="Arial"/>
-        <a:defRPr b="0" i="0" sz="1400" u="none" cap="none" strike="noStrike">
+        <a:defRPr sz="1400" b="0" i="0" u="none" strike="noStrike" cap="none">
           <a:solidFill>
             <a:srgbClr val="000000"/>
           </a:solidFill>
@@ -5276,7 +5401,7 @@
           <a:sym typeface="Arial"/>
         </a:defRPr>
       </a:lvl8pPr>
-      <a:lvl9pPr lvl="8" marR="0" rtl="0" algn="l">
+      <a:lvl9pPr marR="0" lvl="8" algn="l" rtl="0">
         <a:lnSpc>
           <a:spcPct val="100000"/>
         </a:lnSpc>
@@ -5290,7 +5415,7 @@
           <a:srgbClr val="000000"/>
         </a:buClr>
         <a:buFont typeface="Arial"/>
-        <a:defRPr b="0" i="0" sz="1400" u="none" cap="none" strike="noStrike">
+        <a:defRPr sz="1400" b="0" i="0" u="none" strike="noStrike" cap="none">
           <a:solidFill>
             <a:srgbClr val="000000"/>
           </a:solidFill>
@@ -5302,7 +5427,7 @@
       </a:lvl9pPr>
     </p:bodyStyle>
     <p:otherStyle>
-      <a:defPPr lvl="0" marR="0" rtl="0" algn="l">
+      <a:defPPr marR="0" lvl="0" algn="l" rtl="0">
         <a:lnSpc>
           <a:spcPct val="100000"/>
         </a:lnSpc>
@@ -5313,7 +5438,7 @@
           <a:spcPts val="0"/>
         </a:spcAft>
       </a:defPPr>
-      <a:lvl1pPr lvl="0" marR="0" rtl="0" algn="l">
+      <a:lvl1pPr marR="0" lvl="0" algn="l" rtl="0">
         <a:lnSpc>
           <a:spcPct val="100000"/>
         </a:lnSpc>
@@ -5327,7 +5452,7 @@
           <a:srgbClr val="000000"/>
         </a:buClr>
         <a:buFont typeface="Arial"/>
-        <a:defRPr b="0" i="0" sz="1400" u="none" cap="none" strike="noStrike">
+        <a:defRPr sz="1400" b="0" i="0" u="none" strike="noStrike" cap="none">
           <a:solidFill>
             <a:srgbClr val="000000"/>
           </a:solidFill>
@@ -5337,7 +5462,7 @@
           <a:sym typeface="Arial"/>
         </a:defRPr>
       </a:lvl1pPr>
-      <a:lvl2pPr lvl="1" marR="0" rtl="0" algn="l">
+      <a:lvl2pPr marR="0" lvl="1" algn="l" rtl="0">
         <a:lnSpc>
           <a:spcPct val="100000"/>
         </a:lnSpc>
@@ -5351,7 +5476,7 @@
           <a:srgbClr val="000000"/>
         </a:buClr>
         <a:buFont typeface="Arial"/>
-        <a:defRPr b="0" i="0" sz="1400" u="none" cap="none" strike="noStrike">
+        <a:defRPr sz="1400" b="0" i="0" u="none" strike="noStrike" cap="none">
           <a:solidFill>
             <a:srgbClr val="000000"/>
           </a:solidFill>
@@ -5361,7 +5486,7 @@
           <a:sym typeface="Arial"/>
         </a:defRPr>
       </a:lvl2pPr>
-      <a:lvl3pPr lvl="2" marR="0" rtl="0" algn="l">
+      <a:lvl3pPr marR="0" lvl="2" algn="l" rtl="0">
         <a:lnSpc>
           <a:spcPct val="100000"/>
         </a:lnSpc>
@@ -5375,7 +5500,7 @@
           <a:srgbClr val="000000"/>
         </a:buClr>
         <a:buFont typeface="Arial"/>
-        <a:defRPr b="0" i="0" sz="1400" u="none" cap="none" strike="noStrike">
+        <a:defRPr sz="1400" b="0" i="0" u="none" strike="noStrike" cap="none">
           <a:solidFill>
             <a:srgbClr val="000000"/>
           </a:solidFill>
@@ -5385,7 +5510,7 @@
           <a:sym typeface="Arial"/>
         </a:defRPr>
       </a:lvl3pPr>
-      <a:lvl4pPr lvl="3" marR="0" rtl="0" algn="l">
+      <a:lvl4pPr marR="0" lvl="3" algn="l" rtl="0">
         <a:lnSpc>
           <a:spcPct val="100000"/>
         </a:lnSpc>
@@ -5399,7 +5524,7 @@
           <a:srgbClr val="000000"/>
         </a:buClr>
         <a:buFont typeface="Arial"/>
-        <a:defRPr b="0" i="0" sz="1400" u="none" cap="none" strike="noStrike">
+        <a:defRPr sz="1400" b="0" i="0" u="none" strike="noStrike" cap="none">
           <a:solidFill>
             <a:srgbClr val="000000"/>
           </a:solidFill>
@@ -5409,7 +5534,7 @@
           <a:sym typeface="Arial"/>
         </a:defRPr>
       </a:lvl4pPr>
-      <a:lvl5pPr lvl="4" marR="0" rtl="0" algn="l">
+      <a:lvl5pPr marR="0" lvl="4" algn="l" rtl="0">
         <a:lnSpc>
           <a:spcPct val="100000"/>
         </a:lnSpc>
@@ -5423,7 +5548,7 @@
           <a:srgbClr val="000000"/>
         </a:buClr>
         <a:buFont typeface="Arial"/>
-        <a:defRPr b="0" i="0" sz="1400" u="none" cap="none" strike="noStrike">
+        <a:defRPr sz="1400" b="0" i="0" u="none" strike="noStrike" cap="none">
           <a:solidFill>
             <a:srgbClr val="000000"/>
           </a:solidFill>
@@ -5433,7 +5558,7 @@
           <a:sym typeface="Arial"/>
         </a:defRPr>
       </a:lvl5pPr>
-      <a:lvl6pPr lvl="5" marR="0" rtl="0" algn="l">
+      <a:lvl6pPr marR="0" lvl="5" algn="l" rtl="0">
         <a:lnSpc>
           <a:spcPct val="100000"/>
         </a:lnSpc>
@@ -5447,7 +5572,7 @@
           <a:srgbClr val="000000"/>
         </a:buClr>
         <a:buFont typeface="Arial"/>
-        <a:defRPr b="0" i="0" sz="1400" u="none" cap="none" strike="noStrike">
+        <a:defRPr sz="1400" b="0" i="0" u="none" strike="noStrike" cap="none">
           <a:solidFill>
             <a:srgbClr val="000000"/>
           </a:solidFill>
@@ -5457,7 +5582,7 @@
           <a:sym typeface="Arial"/>
         </a:defRPr>
       </a:lvl6pPr>
-      <a:lvl7pPr lvl="6" marR="0" rtl="0" algn="l">
+      <a:lvl7pPr marR="0" lvl="6" algn="l" rtl="0">
         <a:lnSpc>
           <a:spcPct val="100000"/>
         </a:lnSpc>
@@ -5471,7 +5596,7 @@
           <a:srgbClr val="000000"/>
         </a:buClr>
         <a:buFont typeface="Arial"/>
-        <a:defRPr b="0" i="0" sz="1400" u="none" cap="none" strike="noStrike">
+        <a:defRPr sz="1400" b="0" i="0" u="none" strike="noStrike" cap="none">
           <a:solidFill>
             <a:srgbClr val="000000"/>
           </a:solidFill>
@@ -5481,7 +5606,7 @@
           <a:sym typeface="Arial"/>
         </a:defRPr>
       </a:lvl7pPr>
-      <a:lvl8pPr lvl="7" marR="0" rtl="0" algn="l">
+      <a:lvl8pPr marR="0" lvl="7" algn="l" rtl="0">
         <a:lnSpc>
           <a:spcPct val="100000"/>
         </a:lnSpc>
@@ -5495,7 +5620,7 @@
           <a:srgbClr val="000000"/>
         </a:buClr>
         <a:buFont typeface="Arial"/>
-        <a:defRPr b="0" i="0" sz="1400" u="none" cap="none" strike="noStrike">
+        <a:defRPr sz="1400" b="0" i="0" u="none" strike="noStrike" cap="none">
           <a:solidFill>
             <a:srgbClr val="000000"/>
           </a:solidFill>
@@ -5505,7 +5630,7 @@
           <a:sym typeface="Arial"/>
         </a:defRPr>
       </a:lvl8pPr>
-      <a:lvl9pPr lvl="8" marR="0" rtl="0" algn="l">
+      <a:lvl9pPr marR="0" lvl="8" algn="l" rtl="0">
         <a:lnSpc>
           <a:spcPct val="100000"/>
         </a:lnSpc>
@@ -5519,7 +5644,7 @@
           <a:srgbClr val="000000"/>
         </a:buClr>
         <a:buFont typeface="Arial"/>
-        <a:defRPr b="0" i="0" sz="1400" u="none" cap="none" strike="noStrike">
+        <a:defRPr sz="1400" b="0" i="0" u="none" strike="noStrike" cap="none">
           <a:solidFill>
             <a:srgbClr val="000000"/>
           </a:solidFill>
@@ -5535,11 +5660,11 @@
 </file>
 
 <file path=ppt/slides/slide1.xml><?xml version="1.0" encoding="utf-8"?>
-<p:sld xmlns:a="http://schemas.openxmlformats.org/drawingml/2006/main" xmlns:r="http://schemas.openxmlformats.org/officeDocument/2006/relationships" xmlns:mc="http://schemas.openxmlformats.org/markup-compatibility/2006" xmlns:mv="urn:schemas-microsoft-com:mac:vml" xmlns:p="http://schemas.openxmlformats.org/presentationml/2006/main" xmlns:c="http://schemas.openxmlformats.org/drawingml/2006/chart" xmlns:dgm="http://schemas.openxmlformats.org/drawingml/2006/diagram" xmlns:o="urn:schemas-microsoft-com:office:office" xmlns:v="urn:schemas-microsoft-com:vml" xmlns:pvml="urn:schemas-microsoft-com:office:powerpoint" xmlns:com="http://schemas.openxmlformats.org/drawingml/2006/compatibility" xmlns:p14="http://schemas.microsoft.com/office/powerpoint/2010/main" xmlns:p15="http://schemas.microsoft.com/office/powerpoint/2012/main" xmlns:ahyp="http://schemas.microsoft.com/office/drawing/2018/hyperlinkcolor">
+<p:sld xmlns:a="http://schemas.openxmlformats.org/drawingml/2006/main" xmlns:r="http://schemas.openxmlformats.org/officeDocument/2006/relationships" xmlns:p="http://schemas.openxmlformats.org/presentationml/2006/main">
   <p:cSld>
     <p:spTree>
       <p:nvGrpSpPr>
-        <p:cNvPr id="53" name="Shape 53"/>
+        <p:cNvPr id="1" name="Shape 53"/>
         <p:cNvGrpSpPr/>
         <p:nvPr/>
       </p:nvGrpSpPr>
@@ -5587,7 +5712,7 @@
         </p:nvSpPr>
         <p:spPr>
           <a:xfrm>
-            <a:off x="3770475" y="771525"/>
+            <a:off x="3695112" y="809919"/>
             <a:ext cx="3644400" cy="384900"/>
           </a:xfrm>
           <a:prstGeom prst="rect">
@@ -5599,12 +5724,12 @@
           </a:ln>
         </p:spPr>
         <p:txBody>
-          <a:bodyPr anchorCtr="0" anchor="t" bIns="91425" lIns="91425" spcFirstLastPara="1" rIns="91425" wrap="square" tIns="91425">
+          <a:bodyPr spcFirstLastPara="1" wrap="square" lIns="91425" tIns="91425" rIns="91425" bIns="91425" anchor="t" anchorCtr="0">
             <a:spAutoFit/>
           </a:bodyPr>
           <a:lstStyle/>
           <a:p>
-            <a:pPr indent="0" lvl="0" marL="0" rtl="0" algn="l">
+            <a:pPr marL="0" lvl="0" indent="0" algn="l" rtl="0">
               <a:spcBef>
                 <a:spcPts val="0"/>
               </a:spcBef>
@@ -5614,14 +5739,14 @@
               <a:buNone/>
             </a:pPr>
             <a:r>
-              <a:rPr lang="el" sz="1300">
+              <a:rPr lang="el" sz="1300" dirty="0">
                 <a:solidFill>
                   <a:schemeClr val="dk1"/>
                 </a:solidFill>
               </a:rPr>
               <a:t>{{Όνομα}} {{Επώνυμο}}</a:t>
             </a:r>
-            <a:endParaRPr sz="800">
+            <a:endParaRPr sz="800" dirty="0">
               <a:solidFill>
                 <a:schemeClr val="dk1"/>
               </a:solidFill>
@@ -5637,8 +5762,8 @@
         </p:nvSpPr>
         <p:spPr>
           <a:xfrm>
-            <a:off x="3572700" y="1031150"/>
-            <a:ext cx="3834900" cy="384900"/>
+            <a:off x="3421975" y="981120"/>
+            <a:ext cx="3129551" cy="454710"/>
           </a:xfrm>
           <a:prstGeom prst="rect">
             <a:avLst/>
@@ -5649,12 +5774,12 @@
           </a:ln>
         </p:spPr>
         <p:txBody>
-          <a:bodyPr anchorCtr="0" anchor="t" bIns="91425" lIns="91425" spcFirstLastPara="1" rIns="91425" wrap="square" tIns="91425">
+          <a:bodyPr spcFirstLastPara="1" wrap="square" lIns="91425" tIns="91425" rIns="91425" bIns="91425" anchor="t" anchorCtr="0">
             <a:spAutoFit/>
           </a:bodyPr>
           <a:lstStyle/>
           <a:p>
-            <a:pPr indent="0" lvl="0" marL="0" rtl="0" algn="l">
+            <a:pPr marL="0" lvl="0" indent="0" algn="l" rtl="0">
               <a:lnSpc>
                 <a:spcPct val="135000"/>
               </a:lnSpc>
@@ -5667,14 +5792,14 @@
               <a:buNone/>
             </a:pPr>
             <a:r>
-              <a:rPr lang="el" sz="1300">
+              <a:rPr lang="el" sz="1300" dirty="0">
                 <a:solidFill>
                   <a:schemeClr val="dk1"/>
                 </a:solidFill>
               </a:rPr>
               <a:t>{{ΗμΓεν}}</a:t>
             </a:r>
-            <a:endParaRPr sz="1300">
+            <a:endParaRPr sz="1300" dirty="0">
               <a:solidFill>
                 <a:schemeClr val="dk1"/>
               </a:solidFill>
@@ -5702,12 +5827,12 @@
           </a:ln>
         </p:spPr>
         <p:txBody>
-          <a:bodyPr anchorCtr="0" anchor="t" bIns="91425" lIns="91425" spcFirstLastPara="1" rIns="91425" wrap="square" tIns="91425">
+          <a:bodyPr spcFirstLastPara="1" wrap="square" lIns="91425" tIns="91425" rIns="91425" bIns="91425" anchor="t" anchorCtr="0">
             <a:spAutoFit/>
           </a:bodyPr>
           <a:lstStyle/>
           <a:p>
-            <a:pPr indent="0" lvl="0" marL="0" rtl="0" algn="l">
+            <a:pPr marL="0" lvl="0" indent="0" algn="l" rtl="0">
               <a:spcBef>
                 <a:spcPts val="0"/>
               </a:spcBef>
@@ -5740,8 +5865,8 @@
         </p:nvSpPr>
         <p:spPr>
           <a:xfrm>
-            <a:off x="2570475" y="1470636"/>
-            <a:ext cx="4844400" cy="369300"/>
+            <a:off x="2570476" y="1470636"/>
+            <a:ext cx="2746400" cy="553968"/>
           </a:xfrm>
           <a:prstGeom prst="rect">
             <a:avLst/>
@@ -5752,12 +5877,12 @@
           </a:ln>
         </p:spPr>
         <p:txBody>
-          <a:bodyPr anchorCtr="0" anchor="t" bIns="91425" lIns="91425" spcFirstLastPara="1" rIns="91425" wrap="square" tIns="91425">
+          <a:bodyPr spcFirstLastPara="1" wrap="square" lIns="91425" tIns="91425" rIns="91425" bIns="91425" anchor="t" anchorCtr="0">
             <a:spAutoFit/>
           </a:bodyPr>
           <a:lstStyle/>
           <a:p>
-            <a:pPr indent="0" lvl="0" marL="0" rtl="0" algn="l">
+            <a:pPr marL="0" lvl="0" indent="0" algn="l" rtl="0">
               <a:spcBef>
                 <a:spcPts val="0"/>
               </a:spcBef>
@@ -5767,14 +5892,14 @@
               <a:buNone/>
             </a:pPr>
             <a:r>
-              <a:rPr lang="el" sz="1200">
+              <a:rPr lang="el" sz="1200" dirty="0">
                 <a:solidFill>
                   <a:schemeClr val="dk1"/>
                 </a:solidFill>
               </a:rPr>
-              <a:t>{{Σχολείο}}						{{TAXI}}</a:t>
+              <a:t>{{Σχολείο}}			</a:t>
             </a:r>
-            <a:endParaRPr sz="1200">
+            <a:endParaRPr sz="1200" dirty="0">
               <a:solidFill>
                 <a:schemeClr val="dk1"/>
               </a:solidFill>
@@ -5802,12 +5927,12 @@
           </a:ln>
         </p:spPr>
         <p:txBody>
-          <a:bodyPr anchorCtr="0" anchor="t" bIns="91425" lIns="91425" spcFirstLastPara="1" rIns="91425" wrap="square" tIns="91425">
+          <a:bodyPr spcFirstLastPara="1" wrap="square" lIns="91425" tIns="91425" rIns="91425" bIns="91425" anchor="t" anchorCtr="0">
             <a:spAutoFit/>
           </a:bodyPr>
           <a:lstStyle/>
           <a:p>
-            <a:pPr indent="0" lvl="0" marL="0" rtl="0" algn="l">
+            <a:pPr marL="0" lvl="0" indent="0" algn="l" rtl="0">
               <a:spcBef>
                 <a:spcPts val="0"/>
               </a:spcBef>
@@ -5852,12 +5977,12 @@
           </a:ln>
         </p:spPr>
         <p:txBody>
-          <a:bodyPr anchorCtr="0" anchor="t" bIns="91425" lIns="91425" spcFirstLastPara="1" rIns="91425" wrap="square" tIns="91425">
+          <a:bodyPr spcFirstLastPara="1" wrap="square" lIns="91425" tIns="91425" rIns="91425" bIns="91425" anchor="t" anchorCtr="0">
             <a:spAutoFit/>
           </a:bodyPr>
           <a:lstStyle/>
           <a:p>
-            <a:pPr indent="0" lvl="0" marL="0" rtl="0" algn="l">
+            <a:pPr marL="0" lvl="0" indent="0" algn="l" rtl="0">
               <a:spcBef>
                 <a:spcPts val="0"/>
               </a:spcBef>
@@ -5882,6 +6007,62 @@
           </a:p>
         </p:txBody>
       </p:sp>
+      <p:sp>
+        <p:nvSpPr>
+          <p:cNvPr id="3" name="Google Shape;58;p13">
+            <a:extLst>
+              <a:ext uri="{FF2B5EF4-FFF2-40B4-BE49-F238E27FC236}">
+                <a16:creationId xmlns:a16="http://schemas.microsoft.com/office/drawing/2014/main" id="{2D37493C-1CB0-F88A-BE43-D5525CE82F08}"/>
+              </a:ext>
+            </a:extLst>
+          </p:cNvPr>
+          <p:cNvSpPr txBox="1"/>
+          <p:nvPr/>
+        </p:nvSpPr>
+        <p:spPr>
+          <a:xfrm>
+            <a:off x="5537408" y="1465270"/>
+            <a:ext cx="753853" cy="369302"/>
+          </a:xfrm>
+          <a:prstGeom prst="rect">
+            <a:avLst/>
+          </a:prstGeom>
+          <a:noFill/>
+          <a:ln>
+            <a:noFill/>
+          </a:ln>
+        </p:spPr>
+        <p:txBody>
+          <a:bodyPr spcFirstLastPara="1" wrap="square" lIns="91425" tIns="91425" rIns="91425" bIns="91425" anchor="t" anchorCtr="0">
+            <a:spAutoFit/>
+          </a:bodyPr>
+          <a:lstStyle/>
+          <a:p>
+            <a:pPr marL="0" lvl="0" indent="0" algn="l" rtl="0">
+              <a:spcBef>
+                <a:spcPts val="0"/>
+              </a:spcBef>
+              <a:spcAft>
+                <a:spcPts val="0"/>
+              </a:spcAft>
+              <a:buNone/>
+            </a:pPr>
+            <a:r>
+              <a:rPr lang="en-US" sz="1200" dirty="0">
+                <a:solidFill>
+                  <a:schemeClr val="dk1"/>
+                </a:solidFill>
+              </a:rPr>
+              <a:t>{{TAXI}}</a:t>
+            </a:r>
+            <a:endParaRPr sz="1200" dirty="0">
+              <a:solidFill>
+                <a:schemeClr val="dk1"/>
+              </a:solidFill>
+            </a:endParaRPr>
+          </a:p>
+        </p:txBody>
+      </p:sp>
     </p:spTree>
   </p:cSld>
   <p:clrMapOvr>
@@ -5891,11 +6072,11 @@
 </file>
 
 <file path=ppt/slides/slide2.xml><?xml version="1.0" encoding="utf-8"?>
-<p:sld xmlns:a="http://schemas.openxmlformats.org/drawingml/2006/main" xmlns:r="http://schemas.openxmlformats.org/officeDocument/2006/relationships" xmlns:mc="http://schemas.openxmlformats.org/markup-compatibility/2006" xmlns:mv="urn:schemas-microsoft-com:mac:vml" xmlns:p="http://schemas.openxmlformats.org/presentationml/2006/main" xmlns:c="http://schemas.openxmlformats.org/drawingml/2006/chart" xmlns:dgm="http://schemas.openxmlformats.org/drawingml/2006/diagram" xmlns:o="urn:schemas-microsoft-com:office:office" xmlns:v="urn:schemas-microsoft-com:vml" xmlns:pvml="urn:schemas-microsoft-com:office:powerpoint" xmlns:com="http://schemas.openxmlformats.org/drawingml/2006/compatibility" xmlns:p14="http://schemas.microsoft.com/office/powerpoint/2010/main" xmlns:p15="http://schemas.microsoft.com/office/powerpoint/2012/main" xmlns:ahyp="http://schemas.microsoft.com/office/drawing/2018/hyperlinkcolor">
+<p:sld xmlns:a="http://schemas.openxmlformats.org/drawingml/2006/main" xmlns:r="http://schemas.openxmlformats.org/officeDocument/2006/relationships" xmlns:p="http://schemas.openxmlformats.org/presentationml/2006/main">
   <p:cSld>
     <p:spTree>
       <p:nvGrpSpPr>
-        <p:cNvPr id="64" name="Shape 64"/>
+        <p:cNvPr id="1" name="Shape 64"/>
         <p:cNvGrpSpPr/>
         <p:nvPr/>
       </p:nvGrpSpPr>
@@ -5944,7 +6125,7 @@
 </file>
 
 <file path=ppt/theme/theme1.xml><?xml version="1.0" encoding="utf-8"?>
-<a:theme xmlns:a="http://schemas.openxmlformats.org/drawingml/2006/main" xmlns:r="http://schemas.openxmlformats.org/officeDocument/2006/relationships" name="Simple Light">
+<a:theme xmlns:a="http://schemas.openxmlformats.org/drawingml/2006/main" name="Simple Light">
   <a:themeElements>
     <a:clrScheme name="Simple Light">
       <a:dk1>
@@ -6219,11 +6400,13 @@
       </a:bgFillStyleLst>
     </a:fmtScheme>
   </a:themeElements>
+  <a:objectDefaults/>
+  <a:extraClrSchemeLst/>
 </a:theme>
 </file>
 
 <file path=ppt/theme/theme2.xml><?xml version="1.0" encoding="utf-8"?>
-<a:theme xmlns:a="http://schemas.openxmlformats.org/drawingml/2006/main" xmlns:r="http://schemas.openxmlformats.org/officeDocument/2006/relationships">
+<a:theme xmlns:a="http://schemas.openxmlformats.org/drawingml/2006/main">
   <a:themeElements>
     <a:clrScheme name="Default">
       <a:dk1>
@@ -6498,5 +6681,7 @@
       </a:bgFillStyleLst>
     </a:fmtScheme>
   </a:themeElements>
+  <a:objectDefaults/>
+  <a:extraClrSchemeLst/>
 </a:theme>
 </file>
--- a/resources/templates/ΑΔΥΜ.pptx
+++ b/resources/templates/ΑΔΥΜ.pptx
@@ -6022,7 +6022,7 @@
         <p:spPr>
           <a:xfrm>
             <a:off x="5537408" y="1465270"/>
-            <a:ext cx="753853" cy="369302"/>
+            <a:ext cx="1307892" cy="369302"/>
           </a:xfrm>
           <a:prstGeom prst="rect">
             <a:avLst/>
